--- a/report/fig1_dependence structure HMM.pptx
+++ b/report/fig1_dependence structure HMM.pptx
@@ -2,18 +2,18 @@
 <file path=ppt/presentation.xml><?xml version="1.0" encoding="utf-8"?>
 <p:presentation xmlns:a="http://schemas.openxmlformats.org/drawingml/2006/main" xmlns:r="http://schemas.openxmlformats.org/officeDocument/2006/relationships" xmlns:p="http://schemas.openxmlformats.org/presentationml/2006/main" saveSubsetFonts="1">
   <p:sldMasterIdLst>
-    <p:sldMasterId id="2147483648" r:id="rId4"/>
+    <p:sldMasterId id="2147483684" r:id="rId4"/>
   </p:sldMasterIdLst>
   <p:sldIdLst>
     <p:sldId id="256" r:id="rId5"/>
   </p:sldIdLst>
-  <p:sldSz cx="12192000" cy="6858000"/>
+  <p:sldSz cx="11160125" cy="4319588"/>
   <p:notesSz cx="6858000" cy="9144000"/>
   <p:defaultTextStyle>
     <a:defPPr>
       <a:defRPr lang="en-US"/>
     </a:defPPr>
-    <a:lvl1pPr marL="0" algn="l" defTabSz="914400" rtl="0" eaLnBrk="1" latinLnBrk="0" hangingPunct="1">
+    <a:lvl1pPr marL="0" algn="l" defTabSz="457200" rtl="0" eaLnBrk="1" latinLnBrk="0" hangingPunct="1">
       <a:defRPr sz="1800" kern="1200">
         <a:solidFill>
           <a:schemeClr val="tx1"/>
@@ -23,7 +23,7 @@
         <a:cs typeface="+mn-cs"/>
       </a:defRPr>
     </a:lvl1pPr>
-    <a:lvl2pPr marL="457200" algn="l" defTabSz="914400" rtl="0" eaLnBrk="1" latinLnBrk="0" hangingPunct="1">
+    <a:lvl2pPr marL="457200" algn="l" defTabSz="457200" rtl="0" eaLnBrk="1" latinLnBrk="0" hangingPunct="1">
       <a:defRPr sz="1800" kern="1200">
         <a:solidFill>
           <a:schemeClr val="tx1"/>
@@ -33,7 +33,7 @@
         <a:cs typeface="+mn-cs"/>
       </a:defRPr>
     </a:lvl2pPr>
-    <a:lvl3pPr marL="914400" algn="l" defTabSz="914400" rtl="0" eaLnBrk="1" latinLnBrk="0" hangingPunct="1">
+    <a:lvl3pPr marL="914400" algn="l" defTabSz="457200" rtl="0" eaLnBrk="1" latinLnBrk="0" hangingPunct="1">
       <a:defRPr sz="1800" kern="1200">
         <a:solidFill>
           <a:schemeClr val="tx1"/>
@@ -43,7 +43,7 @@
         <a:cs typeface="+mn-cs"/>
       </a:defRPr>
     </a:lvl3pPr>
-    <a:lvl4pPr marL="1371600" algn="l" defTabSz="914400" rtl="0" eaLnBrk="1" latinLnBrk="0" hangingPunct="1">
+    <a:lvl4pPr marL="1371600" algn="l" defTabSz="457200" rtl="0" eaLnBrk="1" latinLnBrk="0" hangingPunct="1">
       <a:defRPr sz="1800" kern="1200">
         <a:solidFill>
           <a:schemeClr val="tx1"/>
@@ -53,7 +53,7 @@
         <a:cs typeface="+mn-cs"/>
       </a:defRPr>
     </a:lvl4pPr>
-    <a:lvl5pPr marL="1828800" algn="l" defTabSz="914400" rtl="0" eaLnBrk="1" latinLnBrk="0" hangingPunct="1">
+    <a:lvl5pPr marL="1828800" algn="l" defTabSz="457200" rtl="0" eaLnBrk="1" latinLnBrk="0" hangingPunct="1">
       <a:defRPr sz="1800" kern="1200">
         <a:solidFill>
           <a:schemeClr val="tx1"/>
@@ -63,7 +63,7 @@
         <a:cs typeface="+mn-cs"/>
       </a:defRPr>
     </a:lvl5pPr>
-    <a:lvl6pPr marL="2286000" algn="l" defTabSz="914400" rtl="0" eaLnBrk="1" latinLnBrk="0" hangingPunct="1">
+    <a:lvl6pPr marL="2286000" algn="l" defTabSz="457200" rtl="0" eaLnBrk="1" latinLnBrk="0" hangingPunct="1">
       <a:defRPr sz="1800" kern="1200">
         <a:solidFill>
           <a:schemeClr val="tx1"/>
@@ -73,7 +73,7 @@
         <a:cs typeface="+mn-cs"/>
       </a:defRPr>
     </a:lvl6pPr>
-    <a:lvl7pPr marL="2743200" algn="l" defTabSz="914400" rtl="0" eaLnBrk="1" latinLnBrk="0" hangingPunct="1">
+    <a:lvl7pPr marL="2743200" algn="l" defTabSz="457200" rtl="0" eaLnBrk="1" latinLnBrk="0" hangingPunct="1">
       <a:defRPr sz="1800" kern="1200">
         <a:solidFill>
           <a:schemeClr val="tx1"/>
@@ -83,7 +83,7 @@
         <a:cs typeface="+mn-cs"/>
       </a:defRPr>
     </a:lvl7pPr>
-    <a:lvl8pPr marL="3200400" algn="l" defTabSz="914400" rtl="0" eaLnBrk="1" latinLnBrk="0" hangingPunct="1">
+    <a:lvl8pPr marL="3200400" algn="l" defTabSz="457200" rtl="0" eaLnBrk="1" latinLnBrk="0" hangingPunct="1">
       <a:defRPr sz="1800" kern="1200">
         <a:solidFill>
           <a:schemeClr val="tx1"/>
@@ -93,7 +93,7 @@
         <a:cs typeface="+mn-cs"/>
       </a:defRPr>
     </a:lvl8pPr>
-    <a:lvl9pPr marL="3657600" algn="l" defTabSz="914400" rtl="0" eaLnBrk="1" latinLnBrk="0" hangingPunct="1">
+    <a:lvl9pPr marL="3657600" algn="l" defTabSz="457200" rtl="0" eaLnBrk="1" latinLnBrk="0" hangingPunct="1">
       <a:defRPr sz="1800" kern="1200">
         <a:solidFill>
           <a:schemeClr val="tx1"/>
@@ -189,6 +189,246 @@
   <pc:docChgLst>
     <pc:chgData name="Tuan-Anh Bui" userId="31e4dc77-7c7c-4098-a9e6-c08d56111f33" providerId="ADAL" clId="{F5CAEEBB-581A-44E3-A079-AF852F0C9044}"/>
   </pc:docChgLst>
+  <pc:docChgLst>
+    <pc:chgData name="Tuan-Anh Bui" userId="31e4dc77-7c7c-4098-a9e6-c08d56111f33" providerId="ADAL" clId="{B52A113F-6611-4C2C-B86F-957C18059596}"/>
+    <pc:docChg chg="undo modSld">
+      <pc:chgData name="Tuan-Anh Bui" userId="31e4dc77-7c7c-4098-a9e6-c08d56111f33" providerId="ADAL" clId="{B52A113F-6611-4C2C-B86F-957C18059596}" dt="2025-05-05T07:14:32.268" v="5" actId="1076"/>
+      <pc:docMkLst>
+        <pc:docMk/>
+      </pc:docMkLst>
+      <pc:sldChg chg="modSp">
+        <pc:chgData name="Tuan-Anh Bui" userId="31e4dc77-7c7c-4098-a9e6-c08d56111f33" providerId="ADAL" clId="{B52A113F-6611-4C2C-B86F-957C18059596}" dt="2025-05-05T07:14:32.268" v="5" actId="1076"/>
+        <pc:sldMkLst>
+          <pc:docMk/>
+          <pc:sldMk cId="576563766" sldId="256"/>
+        </pc:sldMkLst>
+        <pc:spChg chg="mod">
+          <ac:chgData name="Tuan-Anh Bui" userId="31e4dc77-7c7c-4098-a9e6-c08d56111f33" providerId="ADAL" clId="{B52A113F-6611-4C2C-B86F-957C18059596}" dt="2025-05-05T07:13:32.531" v="0" actId="2711"/>
+          <ac:spMkLst>
+            <pc:docMk/>
+            <pc:sldMk cId="576563766" sldId="256"/>
+            <ac:spMk id="4" creationId="{33D5CB02-2417-4D7F-A5C0-6699EBE03FFE}"/>
+          </ac:spMkLst>
+        </pc:spChg>
+        <pc:spChg chg="mod">
+          <ac:chgData name="Tuan-Anh Bui" userId="31e4dc77-7c7c-4098-a9e6-c08d56111f33" providerId="ADAL" clId="{B52A113F-6611-4C2C-B86F-957C18059596}" dt="2025-05-05T07:13:32.531" v="0" actId="2711"/>
+          <ac:spMkLst>
+            <pc:docMk/>
+            <pc:sldMk cId="576563766" sldId="256"/>
+            <ac:spMk id="5" creationId="{9C02FEAB-865E-4720-8E09-31A2470D9CA8}"/>
+          </ac:spMkLst>
+        </pc:spChg>
+        <pc:spChg chg="mod">
+          <ac:chgData name="Tuan-Anh Bui" userId="31e4dc77-7c7c-4098-a9e6-c08d56111f33" providerId="ADAL" clId="{B52A113F-6611-4C2C-B86F-957C18059596}" dt="2025-05-05T07:13:32.531" v="0" actId="2711"/>
+          <ac:spMkLst>
+            <pc:docMk/>
+            <pc:sldMk cId="576563766" sldId="256"/>
+            <ac:spMk id="8" creationId="{63D529E3-ACFD-4FEE-B659-D9257D5C3261}"/>
+          </ac:spMkLst>
+        </pc:spChg>
+        <pc:spChg chg="mod">
+          <ac:chgData name="Tuan-Anh Bui" userId="31e4dc77-7c7c-4098-a9e6-c08d56111f33" providerId="ADAL" clId="{B52A113F-6611-4C2C-B86F-957C18059596}" dt="2025-05-05T07:13:32.531" v="0" actId="2711"/>
+          <ac:spMkLst>
+            <pc:docMk/>
+            <pc:sldMk cId="576563766" sldId="256"/>
+            <ac:spMk id="9" creationId="{0C603430-6BC7-40C8-A55C-DABEA830385C}"/>
+          </ac:spMkLst>
+        </pc:spChg>
+        <pc:spChg chg="mod">
+          <ac:chgData name="Tuan-Anh Bui" userId="31e4dc77-7c7c-4098-a9e6-c08d56111f33" providerId="ADAL" clId="{B52A113F-6611-4C2C-B86F-957C18059596}" dt="2025-05-05T07:13:32.531" v="0" actId="2711"/>
+          <ac:spMkLst>
+            <pc:docMk/>
+            <pc:sldMk cId="576563766" sldId="256"/>
+            <ac:spMk id="11" creationId="{B26277C8-7595-43FB-856B-F7E0C12E0465}"/>
+          </ac:spMkLst>
+        </pc:spChg>
+        <pc:spChg chg="mod">
+          <ac:chgData name="Tuan-Anh Bui" userId="31e4dc77-7c7c-4098-a9e6-c08d56111f33" providerId="ADAL" clId="{B52A113F-6611-4C2C-B86F-957C18059596}" dt="2025-05-05T07:13:32.531" v="0" actId="2711"/>
+          <ac:spMkLst>
+            <pc:docMk/>
+            <pc:sldMk cId="576563766" sldId="256"/>
+            <ac:spMk id="12" creationId="{254DAA3D-C245-4E29-A532-E78E258A2EEC}"/>
+          </ac:spMkLst>
+        </pc:spChg>
+        <pc:spChg chg="mod">
+          <ac:chgData name="Tuan-Anh Bui" userId="31e4dc77-7c7c-4098-a9e6-c08d56111f33" providerId="ADAL" clId="{B52A113F-6611-4C2C-B86F-957C18059596}" dt="2025-05-05T07:13:32.531" v="0" actId="2711"/>
+          <ac:spMkLst>
+            <pc:docMk/>
+            <pc:sldMk cId="576563766" sldId="256"/>
+            <ac:spMk id="14" creationId="{2588DA7F-C010-40EF-8255-470A49513C40}"/>
+          </ac:spMkLst>
+        </pc:spChg>
+        <pc:spChg chg="mod">
+          <ac:chgData name="Tuan-Anh Bui" userId="31e4dc77-7c7c-4098-a9e6-c08d56111f33" providerId="ADAL" clId="{B52A113F-6611-4C2C-B86F-957C18059596}" dt="2025-05-05T07:13:32.531" v="0" actId="2711"/>
+          <ac:spMkLst>
+            <pc:docMk/>
+            <pc:sldMk cId="576563766" sldId="256"/>
+            <ac:spMk id="15" creationId="{44104B0B-CA56-41C6-861B-218CC46047EF}"/>
+          </ac:spMkLst>
+        </pc:spChg>
+        <pc:spChg chg="mod">
+          <ac:chgData name="Tuan-Anh Bui" userId="31e4dc77-7c7c-4098-a9e6-c08d56111f33" providerId="ADAL" clId="{B52A113F-6611-4C2C-B86F-957C18059596}" dt="2025-05-05T07:13:32.531" v="0" actId="2711"/>
+          <ac:spMkLst>
+            <pc:docMk/>
+            <pc:sldMk cId="576563766" sldId="256"/>
+            <ac:spMk id="17" creationId="{7D35FA63-8672-4F6A-869F-0C5BF197A4A2}"/>
+          </ac:spMkLst>
+        </pc:spChg>
+        <pc:spChg chg="mod">
+          <ac:chgData name="Tuan-Anh Bui" userId="31e4dc77-7c7c-4098-a9e6-c08d56111f33" providerId="ADAL" clId="{B52A113F-6611-4C2C-B86F-957C18059596}" dt="2025-05-05T07:13:32.531" v="0" actId="2711"/>
+          <ac:spMkLst>
+            <pc:docMk/>
+            <pc:sldMk cId="576563766" sldId="256"/>
+            <ac:spMk id="18" creationId="{7AB95024-2E6C-4569-B874-AB985A53D7B8}"/>
+          </ac:spMkLst>
+        </pc:spChg>
+        <pc:spChg chg="mod">
+          <ac:chgData name="Tuan-Anh Bui" userId="31e4dc77-7c7c-4098-a9e6-c08d56111f33" providerId="ADAL" clId="{B52A113F-6611-4C2C-B86F-957C18059596}" dt="2025-05-05T07:13:32.531" v="0" actId="2711"/>
+          <ac:spMkLst>
+            <pc:docMk/>
+            <pc:sldMk cId="576563766" sldId="256"/>
+            <ac:spMk id="20" creationId="{A16078F9-81FE-45EE-8EDB-25D198332AB8}"/>
+          </ac:spMkLst>
+        </pc:spChg>
+        <pc:spChg chg="mod">
+          <ac:chgData name="Tuan-Anh Bui" userId="31e4dc77-7c7c-4098-a9e6-c08d56111f33" providerId="ADAL" clId="{B52A113F-6611-4C2C-B86F-957C18059596}" dt="2025-05-05T07:13:32.531" v="0" actId="2711"/>
+          <ac:spMkLst>
+            <pc:docMk/>
+            <pc:sldMk cId="576563766" sldId="256"/>
+            <ac:spMk id="21" creationId="{29130F36-F9E4-4024-8D28-E4F5B6A88374}"/>
+          </ac:spMkLst>
+        </pc:spChg>
+        <pc:spChg chg="mod">
+          <ac:chgData name="Tuan-Anh Bui" userId="31e4dc77-7c7c-4098-a9e6-c08d56111f33" providerId="ADAL" clId="{B52A113F-6611-4C2C-B86F-957C18059596}" dt="2025-05-05T07:14:32.268" v="5" actId="1076"/>
+          <ac:spMkLst>
+            <pc:docMk/>
+            <pc:sldMk cId="576563766" sldId="256"/>
+            <ac:spMk id="41" creationId="{961AEF4D-F17C-4390-A81C-B5A39903E5EE}"/>
+          </ac:spMkLst>
+        </pc:spChg>
+        <pc:spChg chg="mod">
+          <ac:chgData name="Tuan-Anh Bui" userId="31e4dc77-7c7c-4098-a9e6-c08d56111f33" providerId="ADAL" clId="{B52A113F-6611-4C2C-B86F-957C18059596}" dt="2025-05-05T07:14:32.268" v="5" actId="1076"/>
+          <ac:spMkLst>
+            <pc:docMk/>
+            <pc:sldMk cId="576563766" sldId="256"/>
+            <ac:spMk id="45" creationId="{28D78672-FE8D-46AF-993F-699EFDAB4E60}"/>
+          </ac:spMkLst>
+        </pc:spChg>
+        <pc:spChg chg="mod">
+          <ac:chgData name="Tuan-Anh Bui" userId="31e4dc77-7c7c-4098-a9e6-c08d56111f33" providerId="ADAL" clId="{B52A113F-6611-4C2C-B86F-957C18059596}" dt="2025-05-05T07:14:32.268" v="5" actId="1076"/>
+          <ac:spMkLst>
+            <pc:docMk/>
+            <pc:sldMk cId="576563766" sldId="256"/>
+            <ac:spMk id="46" creationId="{5154CFAD-3D17-4DE9-AC72-56C0B5BC2CC8}"/>
+          </ac:spMkLst>
+        </pc:spChg>
+        <pc:grpChg chg="mod">
+          <ac:chgData name="Tuan-Anh Bui" userId="31e4dc77-7c7c-4098-a9e6-c08d56111f33" providerId="ADAL" clId="{B52A113F-6611-4C2C-B86F-957C18059596}" dt="2025-05-05T07:14:32.268" v="5" actId="1076"/>
+          <ac:grpSpMkLst>
+            <pc:docMk/>
+            <pc:sldMk cId="576563766" sldId="256"/>
+            <ac:grpSpMk id="6" creationId="{58DDDC31-7270-4813-B836-7C7552B9A393}"/>
+          </ac:grpSpMkLst>
+        </pc:grpChg>
+        <pc:grpChg chg="mod">
+          <ac:chgData name="Tuan-Anh Bui" userId="31e4dc77-7c7c-4098-a9e6-c08d56111f33" providerId="ADAL" clId="{B52A113F-6611-4C2C-B86F-957C18059596}" dt="2025-05-05T07:14:32.268" v="5" actId="1076"/>
+          <ac:grpSpMkLst>
+            <pc:docMk/>
+            <pc:sldMk cId="576563766" sldId="256"/>
+            <ac:grpSpMk id="7" creationId="{DD51A39F-98A4-47CE-8052-894AD92A1923}"/>
+          </ac:grpSpMkLst>
+        </pc:grpChg>
+        <pc:grpChg chg="mod">
+          <ac:chgData name="Tuan-Anh Bui" userId="31e4dc77-7c7c-4098-a9e6-c08d56111f33" providerId="ADAL" clId="{B52A113F-6611-4C2C-B86F-957C18059596}" dt="2025-05-05T07:14:32.268" v="5" actId="1076"/>
+          <ac:grpSpMkLst>
+            <pc:docMk/>
+            <pc:sldMk cId="576563766" sldId="256"/>
+            <ac:grpSpMk id="10" creationId="{8242AA4F-C60B-4F82-BB35-3BC9A2CBDB5D}"/>
+          </ac:grpSpMkLst>
+        </pc:grpChg>
+        <pc:grpChg chg="mod">
+          <ac:chgData name="Tuan-Anh Bui" userId="31e4dc77-7c7c-4098-a9e6-c08d56111f33" providerId="ADAL" clId="{B52A113F-6611-4C2C-B86F-957C18059596}" dt="2025-05-05T07:14:32.268" v="5" actId="1076"/>
+          <ac:grpSpMkLst>
+            <pc:docMk/>
+            <pc:sldMk cId="576563766" sldId="256"/>
+            <ac:grpSpMk id="13" creationId="{A552EAC3-C3EE-42C9-A53A-8E70B4A05DBF}"/>
+          </ac:grpSpMkLst>
+        </pc:grpChg>
+        <pc:grpChg chg="mod">
+          <ac:chgData name="Tuan-Anh Bui" userId="31e4dc77-7c7c-4098-a9e6-c08d56111f33" providerId="ADAL" clId="{B52A113F-6611-4C2C-B86F-957C18059596}" dt="2025-05-05T07:14:32.268" v="5" actId="1076"/>
+          <ac:grpSpMkLst>
+            <pc:docMk/>
+            <pc:sldMk cId="576563766" sldId="256"/>
+            <ac:grpSpMk id="16" creationId="{F90AD23B-4161-41A8-B4E2-3B831A83EBC9}"/>
+          </ac:grpSpMkLst>
+        </pc:grpChg>
+        <pc:grpChg chg="mod">
+          <ac:chgData name="Tuan-Anh Bui" userId="31e4dc77-7c7c-4098-a9e6-c08d56111f33" providerId="ADAL" clId="{B52A113F-6611-4C2C-B86F-957C18059596}" dt="2025-05-05T07:14:32.268" v="5" actId="1076"/>
+          <ac:grpSpMkLst>
+            <pc:docMk/>
+            <pc:sldMk cId="576563766" sldId="256"/>
+            <ac:grpSpMk id="19" creationId="{7760887B-D83D-4AB8-87AE-771A2CC14E0B}"/>
+          </ac:grpSpMkLst>
+        </pc:grpChg>
+        <pc:cxnChg chg="mod">
+          <ac:chgData name="Tuan-Anh Bui" userId="31e4dc77-7c7c-4098-a9e6-c08d56111f33" providerId="ADAL" clId="{B52A113F-6611-4C2C-B86F-957C18059596}" dt="2025-05-05T07:14:32.268" v="5" actId="1076"/>
+          <ac:cxnSpMkLst>
+            <pc:docMk/>
+            <pc:sldMk cId="576563766" sldId="256"/>
+            <ac:cxnSpMk id="23" creationId="{BAB8C5F6-9157-48F9-A397-24DFABB72505}"/>
+          </ac:cxnSpMkLst>
+        </pc:cxnChg>
+        <pc:cxnChg chg="mod">
+          <ac:chgData name="Tuan-Anh Bui" userId="31e4dc77-7c7c-4098-a9e6-c08d56111f33" providerId="ADAL" clId="{B52A113F-6611-4C2C-B86F-957C18059596}" dt="2025-05-05T07:14:32.268" v="5" actId="1076"/>
+          <ac:cxnSpMkLst>
+            <pc:docMk/>
+            <pc:sldMk cId="576563766" sldId="256"/>
+            <ac:cxnSpMk id="26" creationId="{FC5A2104-EC5F-4308-9EB2-97D9148AFF53}"/>
+          </ac:cxnSpMkLst>
+        </pc:cxnChg>
+        <pc:cxnChg chg="mod">
+          <ac:chgData name="Tuan-Anh Bui" userId="31e4dc77-7c7c-4098-a9e6-c08d56111f33" providerId="ADAL" clId="{B52A113F-6611-4C2C-B86F-957C18059596}" dt="2025-05-05T07:14:32.268" v="5" actId="1076"/>
+          <ac:cxnSpMkLst>
+            <pc:docMk/>
+            <pc:sldMk cId="576563766" sldId="256"/>
+            <ac:cxnSpMk id="29" creationId="{8EBAFDC9-1E91-4B95-AF64-CAE55088C01F}"/>
+          </ac:cxnSpMkLst>
+        </pc:cxnChg>
+        <pc:cxnChg chg="mod">
+          <ac:chgData name="Tuan-Anh Bui" userId="31e4dc77-7c7c-4098-a9e6-c08d56111f33" providerId="ADAL" clId="{B52A113F-6611-4C2C-B86F-957C18059596}" dt="2025-05-05T07:14:32.268" v="5" actId="1076"/>
+          <ac:cxnSpMkLst>
+            <pc:docMk/>
+            <pc:sldMk cId="576563766" sldId="256"/>
+            <ac:cxnSpMk id="32" creationId="{11859681-E2E0-4CA2-9D77-069C61F7458D}"/>
+          </ac:cxnSpMkLst>
+        </pc:cxnChg>
+        <pc:cxnChg chg="mod">
+          <ac:chgData name="Tuan-Anh Bui" userId="31e4dc77-7c7c-4098-a9e6-c08d56111f33" providerId="ADAL" clId="{B52A113F-6611-4C2C-B86F-957C18059596}" dt="2025-05-05T07:14:32.268" v="5" actId="1076"/>
+          <ac:cxnSpMkLst>
+            <pc:docMk/>
+            <pc:sldMk cId="576563766" sldId="256"/>
+            <ac:cxnSpMk id="35" creationId="{1BA12E96-2A67-423F-8DBC-0298839D4A61}"/>
+          </ac:cxnSpMkLst>
+        </pc:cxnChg>
+        <pc:cxnChg chg="mod">
+          <ac:chgData name="Tuan-Anh Bui" userId="31e4dc77-7c7c-4098-a9e6-c08d56111f33" providerId="ADAL" clId="{B52A113F-6611-4C2C-B86F-957C18059596}" dt="2025-05-05T07:14:32.268" v="5" actId="1076"/>
+          <ac:cxnSpMkLst>
+            <pc:docMk/>
+            <pc:sldMk cId="576563766" sldId="256"/>
+            <ac:cxnSpMk id="38" creationId="{DAF54C65-EF0D-425C-8B49-4F6D7ED0BD0E}"/>
+          </ac:cxnSpMkLst>
+        </pc:cxnChg>
+        <pc:cxnChg chg="mod">
+          <ac:chgData name="Tuan-Anh Bui" userId="31e4dc77-7c7c-4098-a9e6-c08d56111f33" providerId="ADAL" clId="{B52A113F-6611-4C2C-B86F-957C18059596}" dt="2025-05-05T07:14:32.268" v="5" actId="1076"/>
+          <ac:cxnSpMkLst>
+            <pc:docMk/>
+            <pc:sldMk cId="576563766" sldId="256"/>
+            <ac:cxnSpMk id="39" creationId="{DC691E23-AB6E-4EF9-B101-AA4CE1623B0F}"/>
+          </ac:cxnSpMkLst>
+        </pc:cxnChg>
+      </pc:sldChg>
+    </pc:docChg>
+  </pc:docChgLst>
 </pc:chgInfo>
 </file>
 
@@ -211,13 +451,7 @@
       </p:grpSpPr>
       <p:sp>
         <p:nvSpPr>
-          <p:cNvPr id="2" name="Title 1">
-            <a:extLst>
-              <a:ext uri="{FF2B5EF4-FFF2-40B4-BE49-F238E27FC236}">
-                <a16:creationId xmlns:a16="http://schemas.microsoft.com/office/drawing/2014/main" id="{DE28CBA7-8F21-48BC-AB5A-65F2B6CD6C5F}"/>
-              </a:ext>
-            </a:extLst>
-          </p:cNvPr>
+          <p:cNvPr id="2" name="Title 1"/>
           <p:cNvSpPr>
             <a:spLocks noGrp="1"/>
           </p:cNvSpPr>
@@ -227,15 +461,15 @@
         </p:nvSpPr>
         <p:spPr>
           <a:xfrm>
-            <a:off x="1524000" y="1122363"/>
-            <a:ext cx="9144000" cy="2387600"/>
+            <a:off x="1395016" y="706933"/>
+            <a:ext cx="8370094" cy="1503857"/>
           </a:xfrm>
         </p:spPr>
         <p:txBody>
           <a:bodyPr anchor="b"/>
           <a:lstStyle>
             <a:lvl1pPr algn="ctr">
-              <a:defRPr sz="6000"/>
+              <a:defRPr sz="3779"/>
             </a:lvl1pPr>
           </a:lstStyle>
           <a:p>
@@ -243,19 +477,13 @@
               <a:rPr lang="en-US"/>
               <a:t>Click to edit Master title style</a:t>
             </a:r>
-            <a:endParaRPr lang="en-GB"/>
-          </a:p>
-        </p:txBody>
-      </p:sp>
-      <p:sp>
-        <p:nvSpPr>
-          <p:cNvPr id="3" name="Subtitle 2">
-            <a:extLst>
-              <a:ext uri="{FF2B5EF4-FFF2-40B4-BE49-F238E27FC236}">
-                <a16:creationId xmlns:a16="http://schemas.microsoft.com/office/drawing/2014/main" id="{FED6791F-BD6B-4D21-BB1B-317674A7A0D0}"/>
-              </a:ext>
-            </a:extLst>
-          </p:cNvPr>
+            <a:endParaRPr lang="en-US" dirty="0"/>
+          </a:p>
+        </p:txBody>
+      </p:sp>
+      <p:sp>
+        <p:nvSpPr>
+          <p:cNvPr id="3" name="Subtitle 2"/>
           <p:cNvSpPr>
             <a:spLocks noGrp="1"/>
           </p:cNvSpPr>
@@ -265,8 +493,8 @@
         </p:nvSpPr>
         <p:spPr>
           <a:xfrm>
-            <a:off x="1524000" y="3602038"/>
-            <a:ext cx="9144000" cy="1655762"/>
+            <a:off x="1395016" y="2268784"/>
+            <a:ext cx="8370094" cy="1042900"/>
           </a:xfrm>
         </p:spPr>
         <p:txBody>
@@ -274,39 +502,39 @@
           <a:lstStyle>
             <a:lvl1pPr marL="0" indent="0" algn="ctr">
               <a:buNone/>
-              <a:defRPr sz="2400"/>
+              <a:defRPr sz="1512"/>
             </a:lvl1pPr>
-            <a:lvl2pPr marL="457200" indent="0" algn="ctr">
-              <a:buNone/>
-              <a:defRPr sz="2000"/>
+            <a:lvl2pPr marL="287990" indent="0" algn="ctr">
+              <a:buNone/>
+              <a:defRPr sz="1260"/>
             </a:lvl2pPr>
-            <a:lvl3pPr marL="914400" indent="0" algn="ctr">
-              <a:buNone/>
-              <a:defRPr sz="1800"/>
+            <a:lvl3pPr marL="575981" indent="0" algn="ctr">
+              <a:buNone/>
+              <a:defRPr sz="1134"/>
             </a:lvl3pPr>
-            <a:lvl4pPr marL="1371600" indent="0" algn="ctr">
-              <a:buNone/>
-              <a:defRPr sz="1600"/>
+            <a:lvl4pPr marL="863971" indent="0" algn="ctr">
+              <a:buNone/>
+              <a:defRPr sz="1008"/>
             </a:lvl4pPr>
-            <a:lvl5pPr marL="1828800" indent="0" algn="ctr">
-              <a:buNone/>
-              <a:defRPr sz="1600"/>
+            <a:lvl5pPr marL="1151961" indent="0" algn="ctr">
+              <a:buNone/>
+              <a:defRPr sz="1008"/>
             </a:lvl5pPr>
-            <a:lvl6pPr marL="2286000" indent="0" algn="ctr">
-              <a:buNone/>
-              <a:defRPr sz="1600"/>
+            <a:lvl6pPr marL="1439951" indent="0" algn="ctr">
+              <a:buNone/>
+              <a:defRPr sz="1008"/>
             </a:lvl6pPr>
-            <a:lvl7pPr marL="2743200" indent="0" algn="ctr">
-              <a:buNone/>
-              <a:defRPr sz="1600"/>
+            <a:lvl7pPr marL="1727942" indent="0" algn="ctr">
+              <a:buNone/>
+              <a:defRPr sz="1008"/>
             </a:lvl7pPr>
-            <a:lvl8pPr marL="3200400" indent="0" algn="ctr">
-              <a:buNone/>
-              <a:defRPr sz="1600"/>
+            <a:lvl8pPr marL="2015932" indent="0" algn="ctr">
+              <a:buNone/>
+              <a:defRPr sz="1008"/>
             </a:lvl8pPr>
-            <a:lvl9pPr marL="3657600" indent="0" algn="ctr">
-              <a:buNone/>
-              <a:defRPr sz="1600"/>
+            <a:lvl9pPr marL="2303922" indent="0" algn="ctr">
+              <a:buNone/>
+              <a:defRPr sz="1008"/>
             </a:lvl9pPr>
           </a:lstStyle>
           <a:p>
@@ -314,19 +542,13 @@
               <a:rPr lang="en-US"/>
               <a:t>Click to edit Master subtitle style</a:t>
             </a:r>
-            <a:endParaRPr lang="en-GB"/>
-          </a:p>
-        </p:txBody>
-      </p:sp>
-      <p:sp>
-        <p:nvSpPr>
-          <p:cNvPr id="4" name="Date Placeholder 3">
-            <a:extLst>
-              <a:ext uri="{FF2B5EF4-FFF2-40B4-BE49-F238E27FC236}">
-                <a16:creationId xmlns:a16="http://schemas.microsoft.com/office/drawing/2014/main" id="{E31D52BD-11FC-4C3E-BB1F-0D929FF17325}"/>
-              </a:ext>
-            </a:extLst>
-          </p:cNvPr>
+            <a:endParaRPr lang="en-US" dirty="0"/>
+          </a:p>
+        </p:txBody>
+      </p:sp>
+      <p:sp>
+        <p:nvSpPr>
+          <p:cNvPr id="4" name="Date Placeholder 3"/>
           <p:cNvSpPr>
             <a:spLocks noGrp="1"/>
           </p:cNvSpPr>
@@ -341,7 +563,7 @@
           <a:p>
             <a:fld id="{27B4A0E3-CDE3-4B49-9703-9183D4AA9CA8}" type="datetimeFigureOut">
               <a:rPr lang="en-GB" smtClean="0"/>
-              <a:t>25/03/2025</a:t>
+              <a:t>05/05/2025</a:t>
             </a:fld>
             <a:endParaRPr lang="en-GB"/>
           </a:p>
@@ -349,13 +571,7 @@
       </p:sp>
       <p:sp>
         <p:nvSpPr>
-          <p:cNvPr id="5" name="Footer Placeholder 4">
-            <a:extLst>
-              <a:ext uri="{FF2B5EF4-FFF2-40B4-BE49-F238E27FC236}">
-                <a16:creationId xmlns:a16="http://schemas.microsoft.com/office/drawing/2014/main" id="{05424135-6E5B-4458-9782-CCFCDDE297C8}"/>
-              </a:ext>
-            </a:extLst>
-          </p:cNvPr>
+          <p:cNvPr id="5" name="Footer Placeholder 4"/>
           <p:cNvSpPr>
             <a:spLocks noGrp="1"/>
           </p:cNvSpPr>
@@ -374,13 +590,7 @@
       </p:sp>
       <p:sp>
         <p:nvSpPr>
-          <p:cNvPr id="6" name="Slide Number Placeholder 5">
-            <a:extLst>
-              <a:ext uri="{FF2B5EF4-FFF2-40B4-BE49-F238E27FC236}">
-                <a16:creationId xmlns:a16="http://schemas.microsoft.com/office/drawing/2014/main" id="{4E82A1B6-9D0D-4EEF-AE23-D49E1D529BD2}"/>
-              </a:ext>
-            </a:extLst>
-          </p:cNvPr>
+          <p:cNvPr id="6" name="Slide Number Placeholder 5"/>
           <p:cNvSpPr>
             <a:spLocks noGrp="1"/>
           </p:cNvSpPr>
@@ -404,7 +614,7 @@
     </p:spTree>
     <p:extLst>
       <p:ext uri="{BB962C8B-B14F-4D97-AF65-F5344CB8AC3E}">
-        <p14:creationId xmlns:p14="http://schemas.microsoft.com/office/powerpoint/2010/main" val="3432144289"/>
+        <p14:creationId xmlns:p14="http://schemas.microsoft.com/office/powerpoint/2010/main" val="1995025580"/>
       </p:ext>
     </p:extLst>
   </p:cSld>
@@ -433,13 +643,7 @@
       </p:grpSpPr>
       <p:sp>
         <p:nvSpPr>
-          <p:cNvPr id="2" name="Title 1">
-            <a:extLst>
-              <a:ext uri="{FF2B5EF4-FFF2-40B4-BE49-F238E27FC236}">
-                <a16:creationId xmlns:a16="http://schemas.microsoft.com/office/drawing/2014/main" id="{88932B83-CA0B-43AC-B481-363A5C289670}"/>
-              </a:ext>
-            </a:extLst>
-          </p:cNvPr>
+          <p:cNvPr id="2" name="Title 1"/>
           <p:cNvSpPr>
             <a:spLocks noGrp="1"/>
           </p:cNvSpPr>
@@ -456,19 +660,13 @@
               <a:rPr lang="en-US"/>
               <a:t>Click to edit Master title style</a:t>
             </a:r>
-            <a:endParaRPr lang="en-GB"/>
-          </a:p>
-        </p:txBody>
-      </p:sp>
-      <p:sp>
-        <p:nvSpPr>
-          <p:cNvPr id="3" name="Vertical Text Placeholder 2">
-            <a:extLst>
-              <a:ext uri="{FF2B5EF4-FFF2-40B4-BE49-F238E27FC236}">
-                <a16:creationId xmlns:a16="http://schemas.microsoft.com/office/drawing/2014/main" id="{6572B246-96D1-46F3-8E14-9A2353D89C36}"/>
-              </a:ext>
-            </a:extLst>
-          </p:cNvPr>
+            <a:endParaRPr lang="en-US" dirty="0"/>
+          </a:p>
+        </p:txBody>
+      </p:sp>
+      <p:sp>
+        <p:nvSpPr>
+          <p:cNvPr id="3" name="Vertical Text Placeholder 2"/>
           <p:cNvSpPr>
             <a:spLocks noGrp="1"/>
           </p:cNvSpPr>
@@ -514,19 +712,13 @@
               <a:rPr lang="en-US"/>
               <a:t>Fifth level</a:t>
             </a:r>
-            <a:endParaRPr lang="en-GB"/>
-          </a:p>
-        </p:txBody>
-      </p:sp>
-      <p:sp>
-        <p:nvSpPr>
-          <p:cNvPr id="4" name="Date Placeholder 3">
-            <a:extLst>
-              <a:ext uri="{FF2B5EF4-FFF2-40B4-BE49-F238E27FC236}">
-                <a16:creationId xmlns:a16="http://schemas.microsoft.com/office/drawing/2014/main" id="{98A23DFC-BEEB-417C-951F-2B1D52F169E9}"/>
-              </a:ext>
-            </a:extLst>
-          </p:cNvPr>
+            <a:endParaRPr lang="en-US" dirty="0"/>
+          </a:p>
+        </p:txBody>
+      </p:sp>
+      <p:sp>
+        <p:nvSpPr>
+          <p:cNvPr id="4" name="Date Placeholder 3"/>
           <p:cNvSpPr>
             <a:spLocks noGrp="1"/>
           </p:cNvSpPr>
@@ -541,7 +733,7 @@
           <a:p>
             <a:fld id="{27B4A0E3-CDE3-4B49-9703-9183D4AA9CA8}" type="datetimeFigureOut">
               <a:rPr lang="en-GB" smtClean="0"/>
-              <a:t>25/03/2025</a:t>
+              <a:t>05/05/2025</a:t>
             </a:fld>
             <a:endParaRPr lang="en-GB"/>
           </a:p>
@@ -549,13 +741,7 @@
       </p:sp>
       <p:sp>
         <p:nvSpPr>
-          <p:cNvPr id="5" name="Footer Placeholder 4">
-            <a:extLst>
-              <a:ext uri="{FF2B5EF4-FFF2-40B4-BE49-F238E27FC236}">
-                <a16:creationId xmlns:a16="http://schemas.microsoft.com/office/drawing/2014/main" id="{FC139CB6-9A22-4622-A24E-460AE142AA76}"/>
-              </a:ext>
-            </a:extLst>
-          </p:cNvPr>
+          <p:cNvPr id="5" name="Footer Placeholder 4"/>
           <p:cNvSpPr>
             <a:spLocks noGrp="1"/>
           </p:cNvSpPr>
@@ -574,13 +760,7 @@
       </p:sp>
       <p:sp>
         <p:nvSpPr>
-          <p:cNvPr id="6" name="Slide Number Placeholder 5">
-            <a:extLst>
-              <a:ext uri="{FF2B5EF4-FFF2-40B4-BE49-F238E27FC236}">
-                <a16:creationId xmlns:a16="http://schemas.microsoft.com/office/drawing/2014/main" id="{CFDDA527-4002-4A92-AC44-C4B394661BBC}"/>
-              </a:ext>
-            </a:extLst>
-          </p:cNvPr>
+          <p:cNvPr id="6" name="Slide Number Placeholder 5"/>
           <p:cNvSpPr>
             <a:spLocks noGrp="1"/>
           </p:cNvSpPr>
@@ -604,7 +784,7 @@
     </p:spTree>
     <p:extLst>
       <p:ext uri="{BB962C8B-B14F-4D97-AF65-F5344CB8AC3E}">
-        <p14:creationId xmlns:p14="http://schemas.microsoft.com/office/powerpoint/2010/main" val="712376706"/>
+        <p14:creationId xmlns:p14="http://schemas.microsoft.com/office/powerpoint/2010/main" val="183188159"/>
       </p:ext>
     </p:extLst>
   </p:cSld>
@@ -633,13 +813,7 @@
       </p:grpSpPr>
       <p:sp>
         <p:nvSpPr>
-          <p:cNvPr id="2" name="Vertical Title 1">
-            <a:extLst>
-              <a:ext uri="{FF2B5EF4-FFF2-40B4-BE49-F238E27FC236}">
-                <a16:creationId xmlns:a16="http://schemas.microsoft.com/office/drawing/2014/main" id="{819F13D8-3025-4716-B5BD-38D51F53CC99}"/>
-              </a:ext>
-            </a:extLst>
-          </p:cNvPr>
+          <p:cNvPr id="2" name="Vertical Title 1"/>
           <p:cNvSpPr>
             <a:spLocks noGrp="1"/>
           </p:cNvSpPr>
@@ -649,8 +823,8 @@
         </p:nvSpPr>
         <p:spPr>
           <a:xfrm>
-            <a:off x="8724900" y="365125"/>
-            <a:ext cx="2628900" cy="5811838"/>
+            <a:off x="7986464" y="229978"/>
+            <a:ext cx="2406402" cy="3660651"/>
           </a:xfrm>
         </p:spPr>
         <p:txBody>
@@ -661,19 +835,13 @@
               <a:rPr lang="en-US"/>
               <a:t>Click to edit Master title style</a:t>
             </a:r>
-            <a:endParaRPr lang="en-GB"/>
-          </a:p>
-        </p:txBody>
-      </p:sp>
-      <p:sp>
-        <p:nvSpPr>
-          <p:cNvPr id="3" name="Vertical Text Placeholder 2">
-            <a:extLst>
-              <a:ext uri="{FF2B5EF4-FFF2-40B4-BE49-F238E27FC236}">
-                <a16:creationId xmlns:a16="http://schemas.microsoft.com/office/drawing/2014/main" id="{5F467EEF-B9C9-4720-96A2-6916B4F2E655}"/>
-              </a:ext>
-            </a:extLst>
-          </p:cNvPr>
+            <a:endParaRPr lang="en-US" dirty="0"/>
+          </a:p>
+        </p:txBody>
+      </p:sp>
+      <p:sp>
+        <p:nvSpPr>
+          <p:cNvPr id="3" name="Vertical Text Placeholder 2"/>
           <p:cNvSpPr>
             <a:spLocks noGrp="1"/>
           </p:cNvSpPr>
@@ -683,8 +851,8 @@
         </p:nvSpPr>
         <p:spPr>
           <a:xfrm>
-            <a:off x="838200" y="365125"/>
-            <a:ext cx="7734300" cy="5811838"/>
+            <a:off x="767259" y="229978"/>
+            <a:ext cx="7079704" cy="3660651"/>
           </a:xfrm>
         </p:spPr>
         <p:txBody>
@@ -724,19 +892,13 @@
               <a:rPr lang="en-US"/>
               <a:t>Fifth level</a:t>
             </a:r>
-            <a:endParaRPr lang="en-GB"/>
-          </a:p>
-        </p:txBody>
-      </p:sp>
-      <p:sp>
-        <p:nvSpPr>
-          <p:cNvPr id="4" name="Date Placeholder 3">
-            <a:extLst>
-              <a:ext uri="{FF2B5EF4-FFF2-40B4-BE49-F238E27FC236}">
-                <a16:creationId xmlns:a16="http://schemas.microsoft.com/office/drawing/2014/main" id="{01F82FC2-E19A-4240-A157-3194C03653F5}"/>
-              </a:ext>
-            </a:extLst>
-          </p:cNvPr>
+            <a:endParaRPr lang="en-US" dirty="0"/>
+          </a:p>
+        </p:txBody>
+      </p:sp>
+      <p:sp>
+        <p:nvSpPr>
+          <p:cNvPr id="4" name="Date Placeholder 3"/>
           <p:cNvSpPr>
             <a:spLocks noGrp="1"/>
           </p:cNvSpPr>
@@ -751,7 +913,7 @@
           <a:p>
             <a:fld id="{27B4A0E3-CDE3-4B49-9703-9183D4AA9CA8}" type="datetimeFigureOut">
               <a:rPr lang="en-GB" smtClean="0"/>
-              <a:t>25/03/2025</a:t>
+              <a:t>05/05/2025</a:t>
             </a:fld>
             <a:endParaRPr lang="en-GB"/>
           </a:p>
@@ -759,13 +921,7 @@
       </p:sp>
       <p:sp>
         <p:nvSpPr>
-          <p:cNvPr id="5" name="Footer Placeholder 4">
-            <a:extLst>
-              <a:ext uri="{FF2B5EF4-FFF2-40B4-BE49-F238E27FC236}">
-                <a16:creationId xmlns:a16="http://schemas.microsoft.com/office/drawing/2014/main" id="{DD6098B8-E99B-41EE-ABF0-766BC7EB5AE2}"/>
-              </a:ext>
-            </a:extLst>
-          </p:cNvPr>
+          <p:cNvPr id="5" name="Footer Placeholder 4"/>
           <p:cNvSpPr>
             <a:spLocks noGrp="1"/>
           </p:cNvSpPr>
@@ -784,13 +940,7 @@
       </p:sp>
       <p:sp>
         <p:nvSpPr>
-          <p:cNvPr id="6" name="Slide Number Placeholder 5">
-            <a:extLst>
-              <a:ext uri="{FF2B5EF4-FFF2-40B4-BE49-F238E27FC236}">
-                <a16:creationId xmlns:a16="http://schemas.microsoft.com/office/drawing/2014/main" id="{CDA76592-885E-4255-A969-391E2CF1246D}"/>
-              </a:ext>
-            </a:extLst>
-          </p:cNvPr>
+          <p:cNvPr id="6" name="Slide Number Placeholder 5"/>
           <p:cNvSpPr>
             <a:spLocks noGrp="1"/>
           </p:cNvSpPr>
@@ -814,7 +964,7 @@
     </p:spTree>
     <p:extLst>
       <p:ext uri="{BB962C8B-B14F-4D97-AF65-F5344CB8AC3E}">
-        <p14:creationId xmlns:p14="http://schemas.microsoft.com/office/powerpoint/2010/main" val="685068484"/>
+        <p14:creationId xmlns:p14="http://schemas.microsoft.com/office/powerpoint/2010/main" val="2512914657"/>
       </p:ext>
     </p:extLst>
   </p:cSld>
@@ -843,13 +993,7 @@
       </p:grpSpPr>
       <p:sp>
         <p:nvSpPr>
-          <p:cNvPr id="2" name="Title 1">
-            <a:extLst>
-              <a:ext uri="{FF2B5EF4-FFF2-40B4-BE49-F238E27FC236}">
-                <a16:creationId xmlns:a16="http://schemas.microsoft.com/office/drawing/2014/main" id="{1AC61B60-1C3A-4E1B-9914-CFFE4C1B2F16}"/>
-              </a:ext>
-            </a:extLst>
-          </p:cNvPr>
+          <p:cNvPr id="2" name="Title 1"/>
           <p:cNvSpPr>
             <a:spLocks noGrp="1"/>
           </p:cNvSpPr>
@@ -866,19 +1010,13 @@
               <a:rPr lang="en-US"/>
               <a:t>Click to edit Master title style</a:t>
             </a:r>
-            <a:endParaRPr lang="en-GB"/>
-          </a:p>
-        </p:txBody>
-      </p:sp>
-      <p:sp>
-        <p:nvSpPr>
-          <p:cNvPr id="3" name="Content Placeholder 2">
-            <a:extLst>
-              <a:ext uri="{FF2B5EF4-FFF2-40B4-BE49-F238E27FC236}">
-                <a16:creationId xmlns:a16="http://schemas.microsoft.com/office/drawing/2014/main" id="{A5A8D625-23D1-4F9E-B9A1-6C2AC6CF64FD}"/>
-              </a:ext>
-            </a:extLst>
-          </p:cNvPr>
+            <a:endParaRPr lang="en-US" dirty="0"/>
+          </a:p>
+        </p:txBody>
+      </p:sp>
+      <p:sp>
+        <p:nvSpPr>
+          <p:cNvPr id="3" name="Content Placeholder 2"/>
           <p:cNvSpPr>
             <a:spLocks noGrp="1"/>
           </p:cNvSpPr>
@@ -924,19 +1062,13 @@
               <a:rPr lang="en-US"/>
               <a:t>Fifth level</a:t>
             </a:r>
-            <a:endParaRPr lang="en-GB"/>
-          </a:p>
-        </p:txBody>
-      </p:sp>
-      <p:sp>
-        <p:nvSpPr>
-          <p:cNvPr id="4" name="Date Placeholder 3">
-            <a:extLst>
-              <a:ext uri="{FF2B5EF4-FFF2-40B4-BE49-F238E27FC236}">
-                <a16:creationId xmlns:a16="http://schemas.microsoft.com/office/drawing/2014/main" id="{6E8295FF-97C8-4201-BCDB-50427409C9A5}"/>
-              </a:ext>
-            </a:extLst>
-          </p:cNvPr>
+            <a:endParaRPr lang="en-US" dirty="0"/>
+          </a:p>
+        </p:txBody>
+      </p:sp>
+      <p:sp>
+        <p:nvSpPr>
+          <p:cNvPr id="4" name="Date Placeholder 3"/>
           <p:cNvSpPr>
             <a:spLocks noGrp="1"/>
           </p:cNvSpPr>
@@ -951,7 +1083,7 @@
           <a:p>
             <a:fld id="{27B4A0E3-CDE3-4B49-9703-9183D4AA9CA8}" type="datetimeFigureOut">
               <a:rPr lang="en-GB" smtClean="0"/>
-              <a:t>25/03/2025</a:t>
+              <a:t>05/05/2025</a:t>
             </a:fld>
             <a:endParaRPr lang="en-GB"/>
           </a:p>
@@ -959,13 +1091,7 @@
       </p:sp>
       <p:sp>
         <p:nvSpPr>
-          <p:cNvPr id="5" name="Footer Placeholder 4">
-            <a:extLst>
-              <a:ext uri="{FF2B5EF4-FFF2-40B4-BE49-F238E27FC236}">
-                <a16:creationId xmlns:a16="http://schemas.microsoft.com/office/drawing/2014/main" id="{BF63AD72-9836-4010-B39E-96065EF6BD25}"/>
-              </a:ext>
-            </a:extLst>
-          </p:cNvPr>
+          <p:cNvPr id="5" name="Footer Placeholder 4"/>
           <p:cNvSpPr>
             <a:spLocks noGrp="1"/>
           </p:cNvSpPr>
@@ -984,13 +1110,7 @@
       </p:sp>
       <p:sp>
         <p:nvSpPr>
-          <p:cNvPr id="6" name="Slide Number Placeholder 5">
-            <a:extLst>
-              <a:ext uri="{FF2B5EF4-FFF2-40B4-BE49-F238E27FC236}">
-                <a16:creationId xmlns:a16="http://schemas.microsoft.com/office/drawing/2014/main" id="{43E34224-48BD-4D0A-B295-9736485D1C04}"/>
-              </a:ext>
-            </a:extLst>
-          </p:cNvPr>
+          <p:cNvPr id="6" name="Slide Number Placeholder 5"/>
           <p:cNvSpPr>
             <a:spLocks noGrp="1"/>
           </p:cNvSpPr>
@@ -1014,7 +1134,7 @@
     </p:spTree>
     <p:extLst>
       <p:ext uri="{BB962C8B-B14F-4D97-AF65-F5344CB8AC3E}">
-        <p14:creationId xmlns:p14="http://schemas.microsoft.com/office/powerpoint/2010/main" val="3865886587"/>
+        <p14:creationId xmlns:p14="http://schemas.microsoft.com/office/powerpoint/2010/main" val="3009350360"/>
       </p:ext>
     </p:extLst>
   </p:cSld>
@@ -1043,13 +1163,7 @@
       </p:grpSpPr>
       <p:sp>
         <p:nvSpPr>
-          <p:cNvPr id="2" name="Title 1">
-            <a:extLst>
-              <a:ext uri="{FF2B5EF4-FFF2-40B4-BE49-F238E27FC236}">
-                <a16:creationId xmlns:a16="http://schemas.microsoft.com/office/drawing/2014/main" id="{E8D88F09-CE52-4214-9041-1BAA36CD1823}"/>
-              </a:ext>
-            </a:extLst>
-          </p:cNvPr>
+          <p:cNvPr id="2" name="Title 1"/>
           <p:cNvSpPr>
             <a:spLocks noGrp="1"/>
           </p:cNvSpPr>
@@ -1059,15 +1173,15 @@
         </p:nvSpPr>
         <p:spPr>
           <a:xfrm>
-            <a:off x="831850" y="1709738"/>
-            <a:ext cx="10515600" cy="2852737"/>
+            <a:off x="761446" y="1076898"/>
+            <a:ext cx="9625608" cy="1796828"/>
           </a:xfrm>
         </p:spPr>
         <p:txBody>
           <a:bodyPr anchor="b"/>
           <a:lstStyle>
             <a:lvl1pPr>
-              <a:defRPr sz="6000"/>
+              <a:defRPr sz="3779"/>
             </a:lvl1pPr>
           </a:lstStyle>
           <a:p>
@@ -1075,19 +1189,13 @@
               <a:rPr lang="en-US"/>
               <a:t>Click to edit Master title style</a:t>
             </a:r>
-            <a:endParaRPr lang="en-GB"/>
-          </a:p>
-        </p:txBody>
-      </p:sp>
-      <p:sp>
-        <p:nvSpPr>
-          <p:cNvPr id="3" name="Text Placeholder 2">
-            <a:extLst>
-              <a:ext uri="{FF2B5EF4-FFF2-40B4-BE49-F238E27FC236}">
-                <a16:creationId xmlns:a16="http://schemas.microsoft.com/office/drawing/2014/main" id="{E46B7B98-F5FE-4D03-8F40-28BF4D0FFB74}"/>
-              </a:ext>
-            </a:extLst>
-          </p:cNvPr>
+            <a:endParaRPr lang="en-US" dirty="0"/>
+          </a:p>
+        </p:txBody>
+      </p:sp>
+      <p:sp>
+        <p:nvSpPr>
+          <p:cNvPr id="3" name="Text Placeholder 2"/>
           <p:cNvSpPr>
             <a:spLocks noGrp="1"/>
           </p:cNvSpPr>
@@ -1097,8 +1205,8 @@
         </p:nvSpPr>
         <p:spPr>
           <a:xfrm>
-            <a:off x="831850" y="4589463"/>
-            <a:ext cx="10515600" cy="1500187"/>
+            <a:off x="761446" y="2890725"/>
+            <a:ext cx="9625608" cy="944910"/>
           </a:xfrm>
         </p:spPr>
         <p:txBody>
@@ -1106,7 +1214,7 @@
           <a:lstStyle>
             <a:lvl1pPr marL="0" indent="0">
               <a:buNone/>
-              <a:defRPr sz="2400">
+              <a:defRPr sz="1512">
                 <a:solidFill>
                   <a:schemeClr val="tx1">
                     <a:tint val="75000"/>
@@ -1114,9 +1222,9 @@
                 </a:solidFill>
               </a:defRPr>
             </a:lvl1pPr>
-            <a:lvl2pPr marL="457200" indent="0">
-              <a:buNone/>
-              <a:defRPr sz="2000">
+            <a:lvl2pPr marL="287990" indent="0">
+              <a:buNone/>
+              <a:defRPr sz="1260">
                 <a:solidFill>
                   <a:schemeClr val="tx1">
                     <a:tint val="75000"/>
@@ -1124,9 +1232,9 @@
                 </a:solidFill>
               </a:defRPr>
             </a:lvl2pPr>
-            <a:lvl3pPr marL="914400" indent="0">
-              <a:buNone/>
-              <a:defRPr sz="1800">
+            <a:lvl3pPr marL="575981" indent="0">
+              <a:buNone/>
+              <a:defRPr sz="1134">
                 <a:solidFill>
                   <a:schemeClr val="tx1">
                     <a:tint val="75000"/>
@@ -1134,9 +1242,9 @@
                 </a:solidFill>
               </a:defRPr>
             </a:lvl3pPr>
-            <a:lvl4pPr marL="1371600" indent="0">
-              <a:buNone/>
-              <a:defRPr sz="1600">
+            <a:lvl4pPr marL="863971" indent="0">
+              <a:buNone/>
+              <a:defRPr sz="1008">
                 <a:solidFill>
                   <a:schemeClr val="tx1">
                     <a:tint val="75000"/>
@@ -1144,9 +1252,9 @@
                 </a:solidFill>
               </a:defRPr>
             </a:lvl4pPr>
-            <a:lvl5pPr marL="1828800" indent="0">
-              <a:buNone/>
-              <a:defRPr sz="1600">
+            <a:lvl5pPr marL="1151961" indent="0">
+              <a:buNone/>
+              <a:defRPr sz="1008">
                 <a:solidFill>
                   <a:schemeClr val="tx1">
                     <a:tint val="75000"/>
@@ -1154,9 +1262,9 @@
                 </a:solidFill>
               </a:defRPr>
             </a:lvl5pPr>
-            <a:lvl6pPr marL="2286000" indent="0">
-              <a:buNone/>
-              <a:defRPr sz="1600">
+            <a:lvl6pPr marL="1439951" indent="0">
+              <a:buNone/>
+              <a:defRPr sz="1008">
                 <a:solidFill>
                   <a:schemeClr val="tx1">
                     <a:tint val="75000"/>
@@ -1164,9 +1272,9 @@
                 </a:solidFill>
               </a:defRPr>
             </a:lvl6pPr>
-            <a:lvl7pPr marL="2743200" indent="0">
-              <a:buNone/>
-              <a:defRPr sz="1600">
+            <a:lvl7pPr marL="1727942" indent="0">
+              <a:buNone/>
+              <a:defRPr sz="1008">
                 <a:solidFill>
                   <a:schemeClr val="tx1">
                     <a:tint val="75000"/>
@@ -1174,9 +1282,9 @@
                 </a:solidFill>
               </a:defRPr>
             </a:lvl7pPr>
-            <a:lvl8pPr marL="3200400" indent="0">
-              <a:buNone/>
-              <a:defRPr sz="1600">
+            <a:lvl8pPr marL="2015932" indent="0">
+              <a:buNone/>
+              <a:defRPr sz="1008">
                 <a:solidFill>
                   <a:schemeClr val="tx1">
                     <a:tint val="75000"/>
@@ -1184,9 +1292,9 @@
                 </a:solidFill>
               </a:defRPr>
             </a:lvl8pPr>
-            <a:lvl9pPr marL="3657600" indent="0">
-              <a:buNone/>
-              <a:defRPr sz="1600">
+            <a:lvl9pPr marL="2303922" indent="0">
+              <a:buNone/>
+              <a:defRPr sz="1008">
                 <a:solidFill>
                   <a:schemeClr val="tx1">
                     <a:tint val="75000"/>
@@ -1206,13 +1314,7 @@
       </p:sp>
       <p:sp>
         <p:nvSpPr>
-          <p:cNvPr id="4" name="Date Placeholder 3">
-            <a:extLst>
-              <a:ext uri="{FF2B5EF4-FFF2-40B4-BE49-F238E27FC236}">
-                <a16:creationId xmlns:a16="http://schemas.microsoft.com/office/drawing/2014/main" id="{BFF3AE28-38EB-44FB-8171-8F6BA99D2BAC}"/>
-              </a:ext>
-            </a:extLst>
-          </p:cNvPr>
+          <p:cNvPr id="4" name="Date Placeholder 3"/>
           <p:cNvSpPr>
             <a:spLocks noGrp="1"/>
           </p:cNvSpPr>
@@ -1227,7 +1329,7 @@
           <a:p>
             <a:fld id="{27B4A0E3-CDE3-4B49-9703-9183D4AA9CA8}" type="datetimeFigureOut">
               <a:rPr lang="en-GB" smtClean="0"/>
-              <a:t>25/03/2025</a:t>
+              <a:t>05/05/2025</a:t>
             </a:fld>
             <a:endParaRPr lang="en-GB"/>
           </a:p>
@@ -1235,13 +1337,7 @@
       </p:sp>
       <p:sp>
         <p:nvSpPr>
-          <p:cNvPr id="5" name="Footer Placeholder 4">
-            <a:extLst>
-              <a:ext uri="{FF2B5EF4-FFF2-40B4-BE49-F238E27FC236}">
-                <a16:creationId xmlns:a16="http://schemas.microsoft.com/office/drawing/2014/main" id="{E49A83E6-C948-4DB8-911D-A414D397DB96}"/>
-              </a:ext>
-            </a:extLst>
-          </p:cNvPr>
+          <p:cNvPr id="5" name="Footer Placeholder 4"/>
           <p:cNvSpPr>
             <a:spLocks noGrp="1"/>
           </p:cNvSpPr>
@@ -1260,13 +1356,7 @@
       </p:sp>
       <p:sp>
         <p:nvSpPr>
-          <p:cNvPr id="6" name="Slide Number Placeholder 5">
-            <a:extLst>
-              <a:ext uri="{FF2B5EF4-FFF2-40B4-BE49-F238E27FC236}">
-                <a16:creationId xmlns:a16="http://schemas.microsoft.com/office/drawing/2014/main" id="{2EAFDAC5-F0D2-4D68-BDAE-4EFC9E9A8A7A}"/>
-              </a:ext>
-            </a:extLst>
-          </p:cNvPr>
+          <p:cNvPr id="6" name="Slide Number Placeholder 5"/>
           <p:cNvSpPr>
             <a:spLocks noGrp="1"/>
           </p:cNvSpPr>
@@ -1290,7 +1380,7 @@
     </p:spTree>
     <p:extLst>
       <p:ext uri="{BB962C8B-B14F-4D97-AF65-F5344CB8AC3E}">
-        <p14:creationId xmlns:p14="http://schemas.microsoft.com/office/powerpoint/2010/main" val="1186489399"/>
+        <p14:creationId xmlns:p14="http://schemas.microsoft.com/office/powerpoint/2010/main" val="4068265987"/>
       </p:ext>
     </p:extLst>
   </p:cSld>
@@ -1319,13 +1409,7 @@
       </p:grpSpPr>
       <p:sp>
         <p:nvSpPr>
-          <p:cNvPr id="2" name="Title 1">
-            <a:extLst>
-              <a:ext uri="{FF2B5EF4-FFF2-40B4-BE49-F238E27FC236}">
-                <a16:creationId xmlns:a16="http://schemas.microsoft.com/office/drawing/2014/main" id="{026E9854-C174-4978-BF05-EBAA71B54E75}"/>
-              </a:ext>
-            </a:extLst>
-          </p:cNvPr>
+          <p:cNvPr id="2" name="Title 1"/>
           <p:cNvSpPr>
             <a:spLocks noGrp="1"/>
           </p:cNvSpPr>
@@ -1342,19 +1426,13 @@
               <a:rPr lang="en-US"/>
               <a:t>Click to edit Master title style</a:t>
             </a:r>
-            <a:endParaRPr lang="en-GB"/>
-          </a:p>
-        </p:txBody>
-      </p:sp>
-      <p:sp>
-        <p:nvSpPr>
-          <p:cNvPr id="3" name="Content Placeholder 2">
-            <a:extLst>
-              <a:ext uri="{FF2B5EF4-FFF2-40B4-BE49-F238E27FC236}">
-                <a16:creationId xmlns:a16="http://schemas.microsoft.com/office/drawing/2014/main" id="{BFE2C505-CCAE-47AA-9A87-117792C28F0D}"/>
-              </a:ext>
-            </a:extLst>
-          </p:cNvPr>
+            <a:endParaRPr lang="en-US" dirty="0"/>
+          </a:p>
+        </p:txBody>
+      </p:sp>
+      <p:sp>
+        <p:nvSpPr>
+          <p:cNvPr id="3" name="Content Placeholder 2"/>
           <p:cNvSpPr>
             <a:spLocks noGrp="1"/>
           </p:cNvSpPr>
@@ -1364,8 +1442,8 @@
         </p:nvSpPr>
         <p:spPr>
           <a:xfrm>
-            <a:off x="838200" y="1825625"/>
-            <a:ext cx="5181600" cy="4351338"/>
+            <a:off x="767259" y="1149890"/>
+            <a:ext cx="4743053" cy="2740739"/>
           </a:xfrm>
         </p:spPr>
         <p:txBody>
@@ -1405,19 +1483,13 @@
               <a:rPr lang="en-US"/>
               <a:t>Fifth level</a:t>
             </a:r>
-            <a:endParaRPr lang="en-GB"/>
-          </a:p>
-        </p:txBody>
-      </p:sp>
-      <p:sp>
-        <p:nvSpPr>
-          <p:cNvPr id="4" name="Content Placeholder 3">
-            <a:extLst>
-              <a:ext uri="{FF2B5EF4-FFF2-40B4-BE49-F238E27FC236}">
-                <a16:creationId xmlns:a16="http://schemas.microsoft.com/office/drawing/2014/main" id="{CEAEEF65-5377-46CA-8ABC-3A9F3F15E999}"/>
-              </a:ext>
-            </a:extLst>
-          </p:cNvPr>
+            <a:endParaRPr lang="en-US" dirty="0"/>
+          </a:p>
+        </p:txBody>
+      </p:sp>
+      <p:sp>
+        <p:nvSpPr>
+          <p:cNvPr id="4" name="Content Placeholder 3"/>
           <p:cNvSpPr>
             <a:spLocks noGrp="1"/>
           </p:cNvSpPr>
@@ -1427,8 +1499,8 @@
         </p:nvSpPr>
         <p:spPr>
           <a:xfrm>
-            <a:off x="6172200" y="1825625"/>
-            <a:ext cx="5181600" cy="4351338"/>
+            <a:off x="5649813" y="1149890"/>
+            <a:ext cx="4743053" cy="2740739"/>
           </a:xfrm>
         </p:spPr>
         <p:txBody>
@@ -1468,19 +1540,13 @@
               <a:rPr lang="en-US"/>
               <a:t>Fifth level</a:t>
             </a:r>
-            <a:endParaRPr lang="en-GB"/>
-          </a:p>
-        </p:txBody>
-      </p:sp>
-      <p:sp>
-        <p:nvSpPr>
-          <p:cNvPr id="5" name="Date Placeholder 4">
-            <a:extLst>
-              <a:ext uri="{FF2B5EF4-FFF2-40B4-BE49-F238E27FC236}">
-                <a16:creationId xmlns:a16="http://schemas.microsoft.com/office/drawing/2014/main" id="{70809195-48C8-47AA-867E-CED6760BEE4C}"/>
-              </a:ext>
-            </a:extLst>
-          </p:cNvPr>
+            <a:endParaRPr lang="en-US" dirty="0"/>
+          </a:p>
+        </p:txBody>
+      </p:sp>
+      <p:sp>
+        <p:nvSpPr>
+          <p:cNvPr id="5" name="Date Placeholder 4"/>
           <p:cNvSpPr>
             <a:spLocks noGrp="1"/>
           </p:cNvSpPr>
@@ -1495,7 +1561,7 @@
           <a:p>
             <a:fld id="{27B4A0E3-CDE3-4B49-9703-9183D4AA9CA8}" type="datetimeFigureOut">
               <a:rPr lang="en-GB" smtClean="0"/>
-              <a:t>25/03/2025</a:t>
+              <a:t>05/05/2025</a:t>
             </a:fld>
             <a:endParaRPr lang="en-GB"/>
           </a:p>
@@ -1503,13 +1569,7 @@
       </p:sp>
       <p:sp>
         <p:nvSpPr>
-          <p:cNvPr id="6" name="Footer Placeholder 5">
-            <a:extLst>
-              <a:ext uri="{FF2B5EF4-FFF2-40B4-BE49-F238E27FC236}">
-                <a16:creationId xmlns:a16="http://schemas.microsoft.com/office/drawing/2014/main" id="{C5344D05-EAC8-4D13-A59D-DAFEBA87AB74}"/>
-              </a:ext>
-            </a:extLst>
-          </p:cNvPr>
+          <p:cNvPr id="6" name="Footer Placeholder 5"/>
           <p:cNvSpPr>
             <a:spLocks noGrp="1"/>
           </p:cNvSpPr>
@@ -1528,13 +1588,7 @@
       </p:sp>
       <p:sp>
         <p:nvSpPr>
-          <p:cNvPr id="7" name="Slide Number Placeholder 6">
-            <a:extLst>
-              <a:ext uri="{FF2B5EF4-FFF2-40B4-BE49-F238E27FC236}">
-                <a16:creationId xmlns:a16="http://schemas.microsoft.com/office/drawing/2014/main" id="{F8723D4A-EC53-4502-B97C-99ECA8780451}"/>
-              </a:ext>
-            </a:extLst>
-          </p:cNvPr>
+          <p:cNvPr id="7" name="Slide Number Placeholder 6"/>
           <p:cNvSpPr>
             <a:spLocks noGrp="1"/>
           </p:cNvSpPr>
@@ -1558,7 +1612,7 @@
     </p:spTree>
     <p:extLst>
       <p:ext uri="{BB962C8B-B14F-4D97-AF65-F5344CB8AC3E}">
-        <p14:creationId xmlns:p14="http://schemas.microsoft.com/office/powerpoint/2010/main" val="248529318"/>
+        <p14:creationId xmlns:p14="http://schemas.microsoft.com/office/powerpoint/2010/main" val="2486595873"/>
       </p:ext>
     </p:extLst>
   </p:cSld>
@@ -1587,13 +1641,7 @@
       </p:grpSpPr>
       <p:sp>
         <p:nvSpPr>
-          <p:cNvPr id="2" name="Title 1">
-            <a:extLst>
-              <a:ext uri="{FF2B5EF4-FFF2-40B4-BE49-F238E27FC236}">
-                <a16:creationId xmlns:a16="http://schemas.microsoft.com/office/drawing/2014/main" id="{C7E9181E-FF58-4E87-8A96-669763BA148D}"/>
-              </a:ext>
-            </a:extLst>
-          </p:cNvPr>
+          <p:cNvPr id="2" name="Title 1"/>
           <p:cNvSpPr>
             <a:spLocks noGrp="1"/>
           </p:cNvSpPr>
@@ -1603,8 +1651,8 @@
         </p:nvSpPr>
         <p:spPr>
           <a:xfrm>
-            <a:off x="839788" y="365125"/>
-            <a:ext cx="10515600" cy="1325563"/>
+            <a:off x="768712" y="229978"/>
+            <a:ext cx="9625608" cy="834921"/>
           </a:xfrm>
         </p:spPr>
         <p:txBody>
@@ -1615,19 +1663,13 @@
               <a:rPr lang="en-US"/>
               <a:t>Click to edit Master title style</a:t>
             </a:r>
-            <a:endParaRPr lang="en-GB"/>
-          </a:p>
-        </p:txBody>
-      </p:sp>
-      <p:sp>
-        <p:nvSpPr>
-          <p:cNvPr id="3" name="Text Placeholder 2">
-            <a:extLst>
-              <a:ext uri="{FF2B5EF4-FFF2-40B4-BE49-F238E27FC236}">
-                <a16:creationId xmlns:a16="http://schemas.microsoft.com/office/drawing/2014/main" id="{5DF040AF-4433-4FC8-AEB3-806706F3D870}"/>
-              </a:ext>
-            </a:extLst>
-          </p:cNvPr>
+            <a:endParaRPr lang="en-US" dirty="0"/>
+          </a:p>
+        </p:txBody>
+      </p:sp>
+      <p:sp>
+        <p:nvSpPr>
+          <p:cNvPr id="3" name="Text Placeholder 2"/>
           <p:cNvSpPr>
             <a:spLocks noGrp="1"/>
           </p:cNvSpPr>
@@ -1637,8 +1679,8 @@
         </p:nvSpPr>
         <p:spPr>
           <a:xfrm>
-            <a:off x="839788" y="1681163"/>
-            <a:ext cx="5157787" cy="823912"/>
+            <a:off x="768712" y="1058899"/>
+            <a:ext cx="4721256" cy="518950"/>
           </a:xfrm>
         </p:spPr>
         <p:txBody>
@@ -1646,39 +1688,39 @@
           <a:lstStyle>
             <a:lvl1pPr marL="0" indent="0">
               <a:buNone/>
-              <a:defRPr sz="2400" b="1"/>
+              <a:defRPr sz="1512" b="1"/>
             </a:lvl1pPr>
-            <a:lvl2pPr marL="457200" indent="0">
-              <a:buNone/>
-              <a:defRPr sz="2000" b="1"/>
+            <a:lvl2pPr marL="287990" indent="0">
+              <a:buNone/>
+              <a:defRPr sz="1260" b="1"/>
             </a:lvl2pPr>
-            <a:lvl3pPr marL="914400" indent="0">
-              <a:buNone/>
-              <a:defRPr sz="1800" b="1"/>
+            <a:lvl3pPr marL="575981" indent="0">
+              <a:buNone/>
+              <a:defRPr sz="1134" b="1"/>
             </a:lvl3pPr>
-            <a:lvl4pPr marL="1371600" indent="0">
-              <a:buNone/>
-              <a:defRPr sz="1600" b="1"/>
+            <a:lvl4pPr marL="863971" indent="0">
+              <a:buNone/>
+              <a:defRPr sz="1008" b="1"/>
             </a:lvl4pPr>
-            <a:lvl5pPr marL="1828800" indent="0">
-              <a:buNone/>
-              <a:defRPr sz="1600" b="1"/>
+            <a:lvl5pPr marL="1151961" indent="0">
+              <a:buNone/>
+              <a:defRPr sz="1008" b="1"/>
             </a:lvl5pPr>
-            <a:lvl6pPr marL="2286000" indent="0">
-              <a:buNone/>
-              <a:defRPr sz="1600" b="1"/>
+            <a:lvl6pPr marL="1439951" indent="0">
+              <a:buNone/>
+              <a:defRPr sz="1008" b="1"/>
             </a:lvl6pPr>
-            <a:lvl7pPr marL="2743200" indent="0">
-              <a:buNone/>
-              <a:defRPr sz="1600" b="1"/>
+            <a:lvl7pPr marL="1727942" indent="0">
+              <a:buNone/>
+              <a:defRPr sz="1008" b="1"/>
             </a:lvl7pPr>
-            <a:lvl8pPr marL="3200400" indent="0">
-              <a:buNone/>
-              <a:defRPr sz="1600" b="1"/>
+            <a:lvl8pPr marL="2015932" indent="0">
+              <a:buNone/>
+              <a:defRPr sz="1008" b="1"/>
             </a:lvl8pPr>
-            <a:lvl9pPr marL="3657600" indent="0">
-              <a:buNone/>
-              <a:defRPr sz="1600" b="1"/>
+            <a:lvl9pPr marL="2303922" indent="0">
+              <a:buNone/>
+              <a:defRPr sz="1008" b="1"/>
             </a:lvl9pPr>
           </a:lstStyle>
           <a:p>
@@ -1692,13 +1734,7 @@
       </p:sp>
       <p:sp>
         <p:nvSpPr>
-          <p:cNvPr id="4" name="Content Placeholder 3">
-            <a:extLst>
-              <a:ext uri="{FF2B5EF4-FFF2-40B4-BE49-F238E27FC236}">
-                <a16:creationId xmlns:a16="http://schemas.microsoft.com/office/drawing/2014/main" id="{A3915445-0F84-4D8E-B44B-0CD8E43E77B2}"/>
-              </a:ext>
-            </a:extLst>
-          </p:cNvPr>
+          <p:cNvPr id="4" name="Content Placeholder 3"/>
           <p:cNvSpPr>
             <a:spLocks noGrp="1"/>
           </p:cNvSpPr>
@@ -1708,8 +1744,8 @@
         </p:nvSpPr>
         <p:spPr>
           <a:xfrm>
-            <a:off x="839788" y="2505075"/>
-            <a:ext cx="5157787" cy="3684588"/>
+            <a:off x="768712" y="1577849"/>
+            <a:ext cx="4721256" cy="2320779"/>
           </a:xfrm>
         </p:spPr>
         <p:txBody>
@@ -1749,19 +1785,13 @@
               <a:rPr lang="en-US"/>
               <a:t>Fifth level</a:t>
             </a:r>
-            <a:endParaRPr lang="en-GB"/>
-          </a:p>
-        </p:txBody>
-      </p:sp>
-      <p:sp>
-        <p:nvSpPr>
-          <p:cNvPr id="5" name="Text Placeholder 4">
-            <a:extLst>
-              <a:ext uri="{FF2B5EF4-FFF2-40B4-BE49-F238E27FC236}">
-                <a16:creationId xmlns:a16="http://schemas.microsoft.com/office/drawing/2014/main" id="{C118A27A-9E34-41BF-8B06-12C5020305CB}"/>
-              </a:ext>
-            </a:extLst>
-          </p:cNvPr>
+            <a:endParaRPr lang="en-US" dirty="0"/>
+          </a:p>
+        </p:txBody>
+      </p:sp>
+      <p:sp>
+        <p:nvSpPr>
+          <p:cNvPr id="5" name="Text Placeholder 4"/>
           <p:cNvSpPr>
             <a:spLocks noGrp="1"/>
           </p:cNvSpPr>
@@ -1771,8 +1801,8 @@
         </p:nvSpPr>
         <p:spPr>
           <a:xfrm>
-            <a:off x="6172200" y="1681163"/>
-            <a:ext cx="5183188" cy="823912"/>
+            <a:off x="5649813" y="1058899"/>
+            <a:ext cx="4744507" cy="518950"/>
           </a:xfrm>
         </p:spPr>
         <p:txBody>
@@ -1780,39 +1810,39 @@
           <a:lstStyle>
             <a:lvl1pPr marL="0" indent="0">
               <a:buNone/>
-              <a:defRPr sz="2400" b="1"/>
+              <a:defRPr sz="1512" b="1"/>
             </a:lvl1pPr>
-            <a:lvl2pPr marL="457200" indent="0">
-              <a:buNone/>
-              <a:defRPr sz="2000" b="1"/>
+            <a:lvl2pPr marL="287990" indent="0">
+              <a:buNone/>
+              <a:defRPr sz="1260" b="1"/>
             </a:lvl2pPr>
-            <a:lvl3pPr marL="914400" indent="0">
-              <a:buNone/>
-              <a:defRPr sz="1800" b="1"/>
+            <a:lvl3pPr marL="575981" indent="0">
+              <a:buNone/>
+              <a:defRPr sz="1134" b="1"/>
             </a:lvl3pPr>
-            <a:lvl4pPr marL="1371600" indent="0">
-              <a:buNone/>
-              <a:defRPr sz="1600" b="1"/>
+            <a:lvl4pPr marL="863971" indent="0">
+              <a:buNone/>
+              <a:defRPr sz="1008" b="1"/>
             </a:lvl4pPr>
-            <a:lvl5pPr marL="1828800" indent="0">
-              <a:buNone/>
-              <a:defRPr sz="1600" b="1"/>
+            <a:lvl5pPr marL="1151961" indent="0">
+              <a:buNone/>
+              <a:defRPr sz="1008" b="1"/>
             </a:lvl5pPr>
-            <a:lvl6pPr marL="2286000" indent="0">
-              <a:buNone/>
-              <a:defRPr sz="1600" b="1"/>
+            <a:lvl6pPr marL="1439951" indent="0">
+              <a:buNone/>
+              <a:defRPr sz="1008" b="1"/>
             </a:lvl6pPr>
-            <a:lvl7pPr marL="2743200" indent="0">
-              <a:buNone/>
-              <a:defRPr sz="1600" b="1"/>
+            <a:lvl7pPr marL="1727942" indent="0">
+              <a:buNone/>
+              <a:defRPr sz="1008" b="1"/>
             </a:lvl7pPr>
-            <a:lvl8pPr marL="3200400" indent="0">
-              <a:buNone/>
-              <a:defRPr sz="1600" b="1"/>
+            <a:lvl8pPr marL="2015932" indent="0">
+              <a:buNone/>
+              <a:defRPr sz="1008" b="1"/>
             </a:lvl8pPr>
-            <a:lvl9pPr marL="3657600" indent="0">
-              <a:buNone/>
-              <a:defRPr sz="1600" b="1"/>
+            <a:lvl9pPr marL="2303922" indent="0">
+              <a:buNone/>
+              <a:defRPr sz="1008" b="1"/>
             </a:lvl9pPr>
           </a:lstStyle>
           <a:p>
@@ -1826,13 +1856,7 @@
       </p:sp>
       <p:sp>
         <p:nvSpPr>
-          <p:cNvPr id="6" name="Content Placeholder 5">
-            <a:extLst>
-              <a:ext uri="{FF2B5EF4-FFF2-40B4-BE49-F238E27FC236}">
-                <a16:creationId xmlns:a16="http://schemas.microsoft.com/office/drawing/2014/main" id="{42A3655C-E324-45E8-9FF4-6108B7712EDE}"/>
-              </a:ext>
-            </a:extLst>
-          </p:cNvPr>
+          <p:cNvPr id="6" name="Content Placeholder 5"/>
           <p:cNvSpPr>
             <a:spLocks noGrp="1"/>
           </p:cNvSpPr>
@@ -1842,8 +1866,8 @@
         </p:nvSpPr>
         <p:spPr>
           <a:xfrm>
-            <a:off x="6172200" y="2505075"/>
-            <a:ext cx="5183188" cy="3684588"/>
+            <a:off x="5649813" y="1577849"/>
+            <a:ext cx="4744507" cy="2320779"/>
           </a:xfrm>
         </p:spPr>
         <p:txBody>
@@ -1883,19 +1907,13 @@
               <a:rPr lang="en-US"/>
               <a:t>Fifth level</a:t>
             </a:r>
-            <a:endParaRPr lang="en-GB"/>
-          </a:p>
-        </p:txBody>
-      </p:sp>
-      <p:sp>
-        <p:nvSpPr>
-          <p:cNvPr id="7" name="Date Placeholder 6">
-            <a:extLst>
-              <a:ext uri="{FF2B5EF4-FFF2-40B4-BE49-F238E27FC236}">
-                <a16:creationId xmlns:a16="http://schemas.microsoft.com/office/drawing/2014/main" id="{B0E3F945-D1D1-438E-BE1B-1FDF4391A6DE}"/>
-              </a:ext>
-            </a:extLst>
-          </p:cNvPr>
+            <a:endParaRPr lang="en-US" dirty="0"/>
+          </a:p>
+        </p:txBody>
+      </p:sp>
+      <p:sp>
+        <p:nvSpPr>
+          <p:cNvPr id="7" name="Date Placeholder 6"/>
           <p:cNvSpPr>
             <a:spLocks noGrp="1"/>
           </p:cNvSpPr>
@@ -1910,7 +1928,7 @@
           <a:p>
             <a:fld id="{27B4A0E3-CDE3-4B49-9703-9183D4AA9CA8}" type="datetimeFigureOut">
               <a:rPr lang="en-GB" smtClean="0"/>
-              <a:t>25/03/2025</a:t>
+              <a:t>05/05/2025</a:t>
             </a:fld>
             <a:endParaRPr lang="en-GB"/>
           </a:p>
@@ -1918,13 +1936,7 @@
       </p:sp>
       <p:sp>
         <p:nvSpPr>
-          <p:cNvPr id="8" name="Footer Placeholder 7">
-            <a:extLst>
-              <a:ext uri="{FF2B5EF4-FFF2-40B4-BE49-F238E27FC236}">
-                <a16:creationId xmlns:a16="http://schemas.microsoft.com/office/drawing/2014/main" id="{53171643-778F-4555-8BE8-DA1000FE43E5}"/>
-              </a:ext>
-            </a:extLst>
-          </p:cNvPr>
+          <p:cNvPr id="8" name="Footer Placeholder 7"/>
           <p:cNvSpPr>
             <a:spLocks noGrp="1"/>
           </p:cNvSpPr>
@@ -1943,13 +1955,7 @@
       </p:sp>
       <p:sp>
         <p:nvSpPr>
-          <p:cNvPr id="9" name="Slide Number Placeholder 8">
-            <a:extLst>
-              <a:ext uri="{FF2B5EF4-FFF2-40B4-BE49-F238E27FC236}">
-                <a16:creationId xmlns:a16="http://schemas.microsoft.com/office/drawing/2014/main" id="{26429B20-8584-437C-B985-4601CF84DE35}"/>
-              </a:ext>
-            </a:extLst>
-          </p:cNvPr>
+          <p:cNvPr id="9" name="Slide Number Placeholder 8"/>
           <p:cNvSpPr>
             <a:spLocks noGrp="1"/>
           </p:cNvSpPr>
@@ -1973,7 +1979,7 @@
     </p:spTree>
     <p:extLst>
       <p:ext uri="{BB962C8B-B14F-4D97-AF65-F5344CB8AC3E}">
-        <p14:creationId xmlns:p14="http://schemas.microsoft.com/office/powerpoint/2010/main" val="1349465555"/>
+        <p14:creationId xmlns:p14="http://schemas.microsoft.com/office/powerpoint/2010/main" val="631779566"/>
       </p:ext>
     </p:extLst>
   </p:cSld>
@@ -2002,13 +2008,7 @@
       </p:grpSpPr>
       <p:sp>
         <p:nvSpPr>
-          <p:cNvPr id="2" name="Title 1">
-            <a:extLst>
-              <a:ext uri="{FF2B5EF4-FFF2-40B4-BE49-F238E27FC236}">
-                <a16:creationId xmlns:a16="http://schemas.microsoft.com/office/drawing/2014/main" id="{80D87C1B-7DF2-4367-A44B-A672575CF909}"/>
-              </a:ext>
-            </a:extLst>
-          </p:cNvPr>
+          <p:cNvPr id="2" name="Title 1"/>
           <p:cNvSpPr>
             <a:spLocks noGrp="1"/>
           </p:cNvSpPr>
@@ -2025,19 +2025,13 @@
               <a:rPr lang="en-US"/>
               <a:t>Click to edit Master title style</a:t>
             </a:r>
-            <a:endParaRPr lang="en-GB"/>
-          </a:p>
-        </p:txBody>
-      </p:sp>
-      <p:sp>
-        <p:nvSpPr>
-          <p:cNvPr id="3" name="Date Placeholder 2">
-            <a:extLst>
-              <a:ext uri="{FF2B5EF4-FFF2-40B4-BE49-F238E27FC236}">
-                <a16:creationId xmlns:a16="http://schemas.microsoft.com/office/drawing/2014/main" id="{951F6910-3798-441A-8E28-F3E570724790}"/>
-              </a:ext>
-            </a:extLst>
-          </p:cNvPr>
+            <a:endParaRPr lang="en-US" dirty="0"/>
+          </a:p>
+        </p:txBody>
+      </p:sp>
+      <p:sp>
+        <p:nvSpPr>
+          <p:cNvPr id="3" name="Date Placeholder 2"/>
           <p:cNvSpPr>
             <a:spLocks noGrp="1"/>
           </p:cNvSpPr>
@@ -2052,7 +2046,7 @@
           <a:p>
             <a:fld id="{27B4A0E3-CDE3-4B49-9703-9183D4AA9CA8}" type="datetimeFigureOut">
               <a:rPr lang="en-GB" smtClean="0"/>
-              <a:t>25/03/2025</a:t>
+              <a:t>05/05/2025</a:t>
             </a:fld>
             <a:endParaRPr lang="en-GB"/>
           </a:p>
@@ -2060,13 +2054,7 @@
       </p:sp>
       <p:sp>
         <p:nvSpPr>
-          <p:cNvPr id="4" name="Footer Placeholder 3">
-            <a:extLst>
-              <a:ext uri="{FF2B5EF4-FFF2-40B4-BE49-F238E27FC236}">
-                <a16:creationId xmlns:a16="http://schemas.microsoft.com/office/drawing/2014/main" id="{BC093DB5-5DE0-4BEC-97B3-B1822F9F0718}"/>
-              </a:ext>
-            </a:extLst>
-          </p:cNvPr>
+          <p:cNvPr id="4" name="Footer Placeholder 3"/>
           <p:cNvSpPr>
             <a:spLocks noGrp="1"/>
           </p:cNvSpPr>
@@ -2085,13 +2073,7 @@
       </p:sp>
       <p:sp>
         <p:nvSpPr>
-          <p:cNvPr id="5" name="Slide Number Placeholder 4">
-            <a:extLst>
-              <a:ext uri="{FF2B5EF4-FFF2-40B4-BE49-F238E27FC236}">
-                <a16:creationId xmlns:a16="http://schemas.microsoft.com/office/drawing/2014/main" id="{C8EFE8C4-4B17-436A-9088-AEF1EAA00C1A}"/>
-              </a:ext>
-            </a:extLst>
-          </p:cNvPr>
+          <p:cNvPr id="5" name="Slide Number Placeholder 4"/>
           <p:cNvSpPr>
             <a:spLocks noGrp="1"/>
           </p:cNvSpPr>
@@ -2115,7 +2097,7 @@
     </p:spTree>
     <p:extLst>
       <p:ext uri="{BB962C8B-B14F-4D97-AF65-F5344CB8AC3E}">
-        <p14:creationId xmlns:p14="http://schemas.microsoft.com/office/powerpoint/2010/main" val="3025064960"/>
+        <p14:creationId xmlns:p14="http://schemas.microsoft.com/office/powerpoint/2010/main" val="2811568355"/>
       </p:ext>
     </p:extLst>
   </p:cSld>
@@ -2144,13 +2126,7 @@
       </p:grpSpPr>
       <p:sp>
         <p:nvSpPr>
-          <p:cNvPr id="2" name="Date Placeholder 1">
-            <a:extLst>
-              <a:ext uri="{FF2B5EF4-FFF2-40B4-BE49-F238E27FC236}">
-                <a16:creationId xmlns:a16="http://schemas.microsoft.com/office/drawing/2014/main" id="{DCAE104F-B49A-4969-8429-682706ADC40A}"/>
-              </a:ext>
-            </a:extLst>
-          </p:cNvPr>
+          <p:cNvPr id="2" name="Date Placeholder 1"/>
           <p:cNvSpPr>
             <a:spLocks noGrp="1"/>
           </p:cNvSpPr>
@@ -2165,7 +2141,7 @@
           <a:p>
             <a:fld id="{27B4A0E3-CDE3-4B49-9703-9183D4AA9CA8}" type="datetimeFigureOut">
               <a:rPr lang="en-GB" smtClean="0"/>
-              <a:t>25/03/2025</a:t>
+              <a:t>05/05/2025</a:t>
             </a:fld>
             <a:endParaRPr lang="en-GB"/>
           </a:p>
@@ -2173,13 +2149,7 @@
       </p:sp>
       <p:sp>
         <p:nvSpPr>
-          <p:cNvPr id="3" name="Footer Placeholder 2">
-            <a:extLst>
-              <a:ext uri="{FF2B5EF4-FFF2-40B4-BE49-F238E27FC236}">
-                <a16:creationId xmlns:a16="http://schemas.microsoft.com/office/drawing/2014/main" id="{66121FB7-F2D7-43CA-98C5-90857924FD6C}"/>
-              </a:ext>
-            </a:extLst>
-          </p:cNvPr>
+          <p:cNvPr id="3" name="Footer Placeholder 2"/>
           <p:cNvSpPr>
             <a:spLocks noGrp="1"/>
           </p:cNvSpPr>
@@ -2198,13 +2168,7 @@
       </p:sp>
       <p:sp>
         <p:nvSpPr>
-          <p:cNvPr id="4" name="Slide Number Placeholder 3">
-            <a:extLst>
-              <a:ext uri="{FF2B5EF4-FFF2-40B4-BE49-F238E27FC236}">
-                <a16:creationId xmlns:a16="http://schemas.microsoft.com/office/drawing/2014/main" id="{A33DBD41-4844-432E-B4D9-3919AD34D79A}"/>
-              </a:ext>
-            </a:extLst>
-          </p:cNvPr>
+          <p:cNvPr id="4" name="Slide Number Placeholder 3"/>
           <p:cNvSpPr>
             <a:spLocks noGrp="1"/>
           </p:cNvSpPr>
@@ -2228,7 +2192,7 @@
     </p:spTree>
     <p:extLst>
       <p:ext uri="{BB962C8B-B14F-4D97-AF65-F5344CB8AC3E}">
-        <p14:creationId xmlns:p14="http://schemas.microsoft.com/office/powerpoint/2010/main" val="597312530"/>
+        <p14:creationId xmlns:p14="http://schemas.microsoft.com/office/powerpoint/2010/main" val="3068793084"/>
       </p:ext>
     </p:extLst>
   </p:cSld>
@@ -2257,13 +2221,7 @@
       </p:grpSpPr>
       <p:sp>
         <p:nvSpPr>
-          <p:cNvPr id="2" name="Title 1">
-            <a:extLst>
-              <a:ext uri="{FF2B5EF4-FFF2-40B4-BE49-F238E27FC236}">
-                <a16:creationId xmlns:a16="http://schemas.microsoft.com/office/drawing/2014/main" id="{90DAF121-594B-4F6D-96AD-3DDD3E5321B0}"/>
-              </a:ext>
-            </a:extLst>
-          </p:cNvPr>
+          <p:cNvPr id="2" name="Title 1"/>
           <p:cNvSpPr>
             <a:spLocks noGrp="1"/>
           </p:cNvSpPr>
@@ -2273,15 +2231,15 @@
         </p:nvSpPr>
         <p:spPr>
           <a:xfrm>
-            <a:off x="839788" y="457200"/>
-            <a:ext cx="3932237" cy="1600200"/>
+            <a:off x="768713" y="287972"/>
+            <a:ext cx="3599430" cy="1007904"/>
           </a:xfrm>
         </p:spPr>
         <p:txBody>
           <a:bodyPr anchor="b"/>
           <a:lstStyle>
             <a:lvl1pPr>
-              <a:defRPr sz="3200"/>
+              <a:defRPr sz="2016"/>
             </a:lvl1pPr>
           </a:lstStyle>
           <a:p>
@@ -2289,19 +2247,13 @@
               <a:rPr lang="en-US"/>
               <a:t>Click to edit Master title style</a:t>
             </a:r>
-            <a:endParaRPr lang="en-GB"/>
-          </a:p>
-        </p:txBody>
-      </p:sp>
-      <p:sp>
-        <p:nvSpPr>
-          <p:cNvPr id="3" name="Content Placeholder 2">
-            <a:extLst>
-              <a:ext uri="{FF2B5EF4-FFF2-40B4-BE49-F238E27FC236}">
-                <a16:creationId xmlns:a16="http://schemas.microsoft.com/office/drawing/2014/main" id="{628D32D3-88CB-4E80-9155-AC6DAFC5A65E}"/>
-              </a:ext>
-            </a:extLst>
-          </p:cNvPr>
+            <a:endParaRPr lang="en-US" dirty="0"/>
+          </a:p>
+        </p:txBody>
+      </p:sp>
+      <p:sp>
+        <p:nvSpPr>
+          <p:cNvPr id="3" name="Content Placeholder 2"/>
           <p:cNvSpPr>
             <a:spLocks noGrp="1"/>
           </p:cNvSpPr>
@@ -2311,39 +2263,39 @@
         </p:nvSpPr>
         <p:spPr>
           <a:xfrm>
-            <a:off x="5183188" y="987425"/>
-            <a:ext cx="6172200" cy="4873625"/>
+            <a:off x="4744507" y="621941"/>
+            <a:ext cx="5649813" cy="3069707"/>
           </a:xfrm>
         </p:spPr>
         <p:txBody>
           <a:bodyPr/>
           <a:lstStyle>
             <a:lvl1pPr>
-              <a:defRPr sz="3200"/>
+              <a:defRPr sz="2016"/>
             </a:lvl1pPr>
             <a:lvl2pPr>
-              <a:defRPr sz="2800"/>
+              <a:defRPr sz="1764"/>
             </a:lvl2pPr>
             <a:lvl3pPr>
-              <a:defRPr sz="2400"/>
+              <a:defRPr sz="1512"/>
             </a:lvl3pPr>
             <a:lvl4pPr>
-              <a:defRPr sz="2000"/>
+              <a:defRPr sz="1260"/>
             </a:lvl4pPr>
             <a:lvl5pPr>
-              <a:defRPr sz="2000"/>
+              <a:defRPr sz="1260"/>
             </a:lvl5pPr>
             <a:lvl6pPr>
-              <a:defRPr sz="2000"/>
+              <a:defRPr sz="1260"/>
             </a:lvl6pPr>
             <a:lvl7pPr>
-              <a:defRPr sz="2000"/>
+              <a:defRPr sz="1260"/>
             </a:lvl7pPr>
             <a:lvl8pPr>
-              <a:defRPr sz="2000"/>
+              <a:defRPr sz="1260"/>
             </a:lvl8pPr>
             <a:lvl9pPr>
-              <a:defRPr sz="2000"/>
+              <a:defRPr sz="1260"/>
             </a:lvl9pPr>
           </a:lstStyle>
           <a:p>
@@ -2380,19 +2332,13 @@
               <a:rPr lang="en-US"/>
               <a:t>Fifth level</a:t>
             </a:r>
-            <a:endParaRPr lang="en-GB"/>
-          </a:p>
-        </p:txBody>
-      </p:sp>
-      <p:sp>
-        <p:nvSpPr>
-          <p:cNvPr id="4" name="Text Placeholder 3">
-            <a:extLst>
-              <a:ext uri="{FF2B5EF4-FFF2-40B4-BE49-F238E27FC236}">
-                <a16:creationId xmlns:a16="http://schemas.microsoft.com/office/drawing/2014/main" id="{781EC09E-B828-44E0-A3F2-5C673FBAF296}"/>
-              </a:ext>
-            </a:extLst>
-          </p:cNvPr>
+            <a:endParaRPr lang="en-US" dirty="0"/>
+          </a:p>
+        </p:txBody>
+      </p:sp>
+      <p:sp>
+        <p:nvSpPr>
+          <p:cNvPr id="4" name="Text Placeholder 3"/>
           <p:cNvSpPr>
             <a:spLocks noGrp="1"/>
           </p:cNvSpPr>
@@ -2402,8 +2348,8 @@
         </p:nvSpPr>
         <p:spPr>
           <a:xfrm>
-            <a:off x="839788" y="2057400"/>
-            <a:ext cx="3932237" cy="3811588"/>
+            <a:off x="768713" y="1295877"/>
+            <a:ext cx="3599430" cy="2400771"/>
           </a:xfrm>
         </p:spPr>
         <p:txBody>
@@ -2411,39 +2357,39 @@
           <a:lstStyle>
             <a:lvl1pPr marL="0" indent="0">
               <a:buNone/>
-              <a:defRPr sz="1600"/>
+              <a:defRPr sz="1008"/>
             </a:lvl1pPr>
-            <a:lvl2pPr marL="457200" indent="0">
-              <a:buNone/>
-              <a:defRPr sz="1400"/>
+            <a:lvl2pPr marL="287990" indent="0">
+              <a:buNone/>
+              <a:defRPr sz="882"/>
             </a:lvl2pPr>
-            <a:lvl3pPr marL="914400" indent="0">
-              <a:buNone/>
-              <a:defRPr sz="1200"/>
+            <a:lvl3pPr marL="575981" indent="0">
+              <a:buNone/>
+              <a:defRPr sz="756"/>
             </a:lvl3pPr>
-            <a:lvl4pPr marL="1371600" indent="0">
-              <a:buNone/>
-              <a:defRPr sz="1000"/>
+            <a:lvl4pPr marL="863971" indent="0">
+              <a:buNone/>
+              <a:defRPr sz="630"/>
             </a:lvl4pPr>
-            <a:lvl5pPr marL="1828800" indent="0">
-              <a:buNone/>
-              <a:defRPr sz="1000"/>
+            <a:lvl5pPr marL="1151961" indent="0">
+              <a:buNone/>
+              <a:defRPr sz="630"/>
             </a:lvl5pPr>
-            <a:lvl6pPr marL="2286000" indent="0">
-              <a:buNone/>
-              <a:defRPr sz="1000"/>
+            <a:lvl6pPr marL="1439951" indent="0">
+              <a:buNone/>
+              <a:defRPr sz="630"/>
             </a:lvl6pPr>
-            <a:lvl7pPr marL="2743200" indent="0">
-              <a:buNone/>
-              <a:defRPr sz="1000"/>
+            <a:lvl7pPr marL="1727942" indent="0">
+              <a:buNone/>
+              <a:defRPr sz="630"/>
             </a:lvl7pPr>
-            <a:lvl8pPr marL="3200400" indent="0">
-              <a:buNone/>
-              <a:defRPr sz="1000"/>
+            <a:lvl8pPr marL="2015932" indent="0">
+              <a:buNone/>
+              <a:defRPr sz="630"/>
             </a:lvl8pPr>
-            <a:lvl9pPr marL="3657600" indent="0">
-              <a:buNone/>
-              <a:defRPr sz="1000"/>
+            <a:lvl9pPr marL="2303922" indent="0">
+              <a:buNone/>
+              <a:defRPr sz="630"/>
             </a:lvl9pPr>
           </a:lstStyle>
           <a:p>
@@ -2457,13 +2403,7 @@
       </p:sp>
       <p:sp>
         <p:nvSpPr>
-          <p:cNvPr id="5" name="Date Placeholder 4">
-            <a:extLst>
-              <a:ext uri="{FF2B5EF4-FFF2-40B4-BE49-F238E27FC236}">
-                <a16:creationId xmlns:a16="http://schemas.microsoft.com/office/drawing/2014/main" id="{DCA99BDC-E8D4-4A84-9613-956E78CB33B0}"/>
-              </a:ext>
-            </a:extLst>
-          </p:cNvPr>
+          <p:cNvPr id="5" name="Date Placeholder 4"/>
           <p:cNvSpPr>
             <a:spLocks noGrp="1"/>
           </p:cNvSpPr>
@@ -2478,7 +2418,7 @@
           <a:p>
             <a:fld id="{27B4A0E3-CDE3-4B49-9703-9183D4AA9CA8}" type="datetimeFigureOut">
               <a:rPr lang="en-GB" smtClean="0"/>
-              <a:t>25/03/2025</a:t>
+              <a:t>05/05/2025</a:t>
             </a:fld>
             <a:endParaRPr lang="en-GB"/>
           </a:p>
@@ -2486,13 +2426,7 @@
       </p:sp>
       <p:sp>
         <p:nvSpPr>
-          <p:cNvPr id="6" name="Footer Placeholder 5">
-            <a:extLst>
-              <a:ext uri="{FF2B5EF4-FFF2-40B4-BE49-F238E27FC236}">
-                <a16:creationId xmlns:a16="http://schemas.microsoft.com/office/drawing/2014/main" id="{34C6DC0F-8D1E-4866-8C61-F0558DA84C8E}"/>
-              </a:ext>
-            </a:extLst>
-          </p:cNvPr>
+          <p:cNvPr id="6" name="Footer Placeholder 5"/>
           <p:cNvSpPr>
             <a:spLocks noGrp="1"/>
           </p:cNvSpPr>
@@ -2511,13 +2445,7 @@
       </p:sp>
       <p:sp>
         <p:nvSpPr>
-          <p:cNvPr id="7" name="Slide Number Placeholder 6">
-            <a:extLst>
-              <a:ext uri="{FF2B5EF4-FFF2-40B4-BE49-F238E27FC236}">
-                <a16:creationId xmlns:a16="http://schemas.microsoft.com/office/drawing/2014/main" id="{07F79610-E8E6-46AB-A093-E4BA1A617EA6}"/>
-              </a:ext>
-            </a:extLst>
-          </p:cNvPr>
+          <p:cNvPr id="7" name="Slide Number Placeholder 6"/>
           <p:cNvSpPr>
             <a:spLocks noGrp="1"/>
           </p:cNvSpPr>
@@ -2541,7 +2469,7 @@
     </p:spTree>
     <p:extLst>
       <p:ext uri="{BB962C8B-B14F-4D97-AF65-F5344CB8AC3E}">
-        <p14:creationId xmlns:p14="http://schemas.microsoft.com/office/powerpoint/2010/main" val="2920329707"/>
+        <p14:creationId xmlns:p14="http://schemas.microsoft.com/office/powerpoint/2010/main" val="4074288409"/>
       </p:ext>
     </p:extLst>
   </p:cSld>
@@ -2570,13 +2498,7 @@
       </p:grpSpPr>
       <p:sp>
         <p:nvSpPr>
-          <p:cNvPr id="2" name="Title 1">
-            <a:extLst>
-              <a:ext uri="{FF2B5EF4-FFF2-40B4-BE49-F238E27FC236}">
-                <a16:creationId xmlns:a16="http://schemas.microsoft.com/office/drawing/2014/main" id="{D3D661CB-3D28-443E-BEBD-444D9008B68E}"/>
-              </a:ext>
-            </a:extLst>
-          </p:cNvPr>
+          <p:cNvPr id="2" name="Title 1"/>
           <p:cNvSpPr>
             <a:spLocks noGrp="1"/>
           </p:cNvSpPr>
@@ -2586,15 +2508,15 @@
         </p:nvSpPr>
         <p:spPr>
           <a:xfrm>
-            <a:off x="839788" y="457200"/>
-            <a:ext cx="3932237" cy="1600200"/>
+            <a:off x="768713" y="287972"/>
+            <a:ext cx="3599430" cy="1007904"/>
           </a:xfrm>
         </p:spPr>
         <p:txBody>
           <a:bodyPr anchor="b"/>
           <a:lstStyle>
             <a:lvl1pPr>
-              <a:defRPr sz="3200"/>
+              <a:defRPr sz="2016"/>
             </a:lvl1pPr>
           </a:lstStyle>
           <a:p>
@@ -2602,21 +2524,15 @@
               <a:rPr lang="en-US"/>
               <a:t>Click to edit Master title style</a:t>
             </a:r>
-            <a:endParaRPr lang="en-GB"/>
-          </a:p>
-        </p:txBody>
-      </p:sp>
-      <p:sp>
-        <p:nvSpPr>
-          <p:cNvPr id="3" name="Picture Placeholder 2">
-            <a:extLst>
-              <a:ext uri="{FF2B5EF4-FFF2-40B4-BE49-F238E27FC236}">
-                <a16:creationId xmlns:a16="http://schemas.microsoft.com/office/drawing/2014/main" id="{E5E7ADDE-D00F-47DD-84EC-6B9F86A46CCA}"/>
-              </a:ext>
-            </a:extLst>
-          </p:cNvPr>
-          <p:cNvSpPr>
-            <a:spLocks noGrp="1"/>
+            <a:endParaRPr lang="en-US" dirty="0"/>
+          </a:p>
+        </p:txBody>
+      </p:sp>
+      <p:sp>
+        <p:nvSpPr>
+          <p:cNvPr id="3" name="Picture Placeholder 2"/>
+          <p:cNvSpPr>
+            <a:spLocks noGrp="1" noChangeAspect="1"/>
           </p:cNvSpPr>
           <p:nvPr>
             <p:ph type="pic" idx="1"/>
@@ -2624,8 +2540,73 @@
         </p:nvSpPr>
         <p:spPr>
           <a:xfrm>
-            <a:off x="5183188" y="987425"/>
-            <a:ext cx="6172200" cy="4873625"/>
+            <a:off x="4744507" y="621941"/>
+            <a:ext cx="5649813" cy="3069707"/>
+          </a:xfrm>
+        </p:spPr>
+        <p:txBody>
+          <a:bodyPr anchor="t"/>
+          <a:lstStyle>
+            <a:lvl1pPr marL="0" indent="0">
+              <a:buNone/>
+              <a:defRPr sz="2016"/>
+            </a:lvl1pPr>
+            <a:lvl2pPr marL="287990" indent="0">
+              <a:buNone/>
+              <a:defRPr sz="1764"/>
+            </a:lvl2pPr>
+            <a:lvl3pPr marL="575981" indent="0">
+              <a:buNone/>
+              <a:defRPr sz="1512"/>
+            </a:lvl3pPr>
+            <a:lvl4pPr marL="863971" indent="0">
+              <a:buNone/>
+              <a:defRPr sz="1260"/>
+            </a:lvl4pPr>
+            <a:lvl5pPr marL="1151961" indent="0">
+              <a:buNone/>
+              <a:defRPr sz="1260"/>
+            </a:lvl5pPr>
+            <a:lvl6pPr marL="1439951" indent="0">
+              <a:buNone/>
+              <a:defRPr sz="1260"/>
+            </a:lvl6pPr>
+            <a:lvl7pPr marL="1727942" indent="0">
+              <a:buNone/>
+              <a:defRPr sz="1260"/>
+            </a:lvl7pPr>
+            <a:lvl8pPr marL="2015932" indent="0">
+              <a:buNone/>
+              <a:defRPr sz="1260"/>
+            </a:lvl8pPr>
+            <a:lvl9pPr marL="2303922" indent="0">
+              <a:buNone/>
+              <a:defRPr sz="1260"/>
+            </a:lvl9pPr>
+          </a:lstStyle>
+          <a:p>
+            <a:r>
+              <a:rPr lang="en-US"/>
+              <a:t>Click icon to add picture</a:t>
+            </a:r>
+            <a:endParaRPr lang="en-US" dirty="0"/>
+          </a:p>
+        </p:txBody>
+      </p:sp>
+      <p:sp>
+        <p:nvSpPr>
+          <p:cNvPr id="4" name="Text Placeholder 3"/>
+          <p:cNvSpPr>
+            <a:spLocks noGrp="1"/>
+          </p:cNvSpPr>
+          <p:nvPr>
+            <p:ph type="body" sz="half" idx="2"/>
+          </p:nvPr>
+        </p:nvSpPr>
+        <p:spPr>
+          <a:xfrm>
+            <a:off x="768713" y="1295877"/>
+            <a:ext cx="3599430" cy="2400771"/>
           </a:xfrm>
         </p:spPr>
         <p:txBody>
@@ -2633,109 +2614,42 @@
           <a:lstStyle>
             <a:lvl1pPr marL="0" indent="0">
               <a:buNone/>
-              <a:defRPr sz="3200"/>
+              <a:defRPr sz="1008"/>
             </a:lvl1pPr>
-            <a:lvl2pPr marL="457200" indent="0">
-              <a:buNone/>
-              <a:defRPr sz="2800"/>
+            <a:lvl2pPr marL="287990" indent="0">
+              <a:buNone/>
+              <a:defRPr sz="882"/>
             </a:lvl2pPr>
-            <a:lvl3pPr marL="914400" indent="0">
-              <a:buNone/>
-              <a:defRPr sz="2400"/>
+            <a:lvl3pPr marL="575981" indent="0">
+              <a:buNone/>
+              <a:defRPr sz="756"/>
             </a:lvl3pPr>
-            <a:lvl4pPr marL="1371600" indent="0">
-              <a:buNone/>
-              <a:defRPr sz="2000"/>
+            <a:lvl4pPr marL="863971" indent="0">
+              <a:buNone/>
+              <a:defRPr sz="630"/>
             </a:lvl4pPr>
-            <a:lvl5pPr marL="1828800" indent="0">
-              <a:buNone/>
-              <a:defRPr sz="2000"/>
+            <a:lvl5pPr marL="1151961" indent="0">
+              <a:buNone/>
+              <a:defRPr sz="630"/>
             </a:lvl5pPr>
-            <a:lvl6pPr marL="2286000" indent="0">
-              <a:buNone/>
-              <a:defRPr sz="2000"/>
+            <a:lvl6pPr marL="1439951" indent="0">
+              <a:buNone/>
+              <a:defRPr sz="630"/>
             </a:lvl6pPr>
-            <a:lvl7pPr marL="2743200" indent="0">
-              <a:buNone/>
-              <a:defRPr sz="2000"/>
+            <a:lvl7pPr marL="1727942" indent="0">
+              <a:buNone/>
+              <a:defRPr sz="630"/>
             </a:lvl7pPr>
-            <a:lvl8pPr marL="3200400" indent="0">
-              <a:buNone/>
-              <a:defRPr sz="2000"/>
+            <a:lvl8pPr marL="2015932" indent="0">
+              <a:buNone/>
+              <a:defRPr sz="630"/>
             </a:lvl8pPr>
-            <a:lvl9pPr marL="3657600" indent="0">
-              <a:buNone/>
-              <a:defRPr sz="2000"/>
+            <a:lvl9pPr marL="2303922" indent="0">
+              <a:buNone/>
+              <a:defRPr sz="630"/>
             </a:lvl9pPr>
           </a:lstStyle>
           <a:p>
-            <a:endParaRPr lang="en-GB"/>
-          </a:p>
-        </p:txBody>
-      </p:sp>
-      <p:sp>
-        <p:nvSpPr>
-          <p:cNvPr id="4" name="Text Placeholder 3">
-            <a:extLst>
-              <a:ext uri="{FF2B5EF4-FFF2-40B4-BE49-F238E27FC236}">
-                <a16:creationId xmlns:a16="http://schemas.microsoft.com/office/drawing/2014/main" id="{103CD89D-1C4E-4410-A8D3-24D16931A757}"/>
-              </a:ext>
-            </a:extLst>
-          </p:cNvPr>
-          <p:cNvSpPr>
-            <a:spLocks noGrp="1"/>
-          </p:cNvSpPr>
-          <p:nvPr>
-            <p:ph type="body" sz="half" idx="2"/>
-          </p:nvPr>
-        </p:nvSpPr>
-        <p:spPr>
-          <a:xfrm>
-            <a:off x="839788" y="2057400"/>
-            <a:ext cx="3932237" cy="3811588"/>
-          </a:xfrm>
-        </p:spPr>
-        <p:txBody>
-          <a:bodyPr/>
-          <a:lstStyle>
-            <a:lvl1pPr marL="0" indent="0">
-              <a:buNone/>
-              <a:defRPr sz="1600"/>
-            </a:lvl1pPr>
-            <a:lvl2pPr marL="457200" indent="0">
-              <a:buNone/>
-              <a:defRPr sz="1400"/>
-            </a:lvl2pPr>
-            <a:lvl3pPr marL="914400" indent="0">
-              <a:buNone/>
-              <a:defRPr sz="1200"/>
-            </a:lvl3pPr>
-            <a:lvl4pPr marL="1371600" indent="0">
-              <a:buNone/>
-              <a:defRPr sz="1000"/>
-            </a:lvl4pPr>
-            <a:lvl5pPr marL="1828800" indent="0">
-              <a:buNone/>
-              <a:defRPr sz="1000"/>
-            </a:lvl5pPr>
-            <a:lvl6pPr marL="2286000" indent="0">
-              <a:buNone/>
-              <a:defRPr sz="1000"/>
-            </a:lvl6pPr>
-            <a:lvl7pPr marL="2743200" indent="0">
-              <a:buNone/>
-              <a:defRPr sz="1000"/>
-            </a:lvl7pPr>
-            <a:lvl8pPr marL="3200400" indent="0">
-              <a:buNone/>
-              <a:defRPr sz="1000"/>
-            </a:lvl8pPr>
-            <a:lvl9pPr marL="3657600" indent="0">
-              <a:buNone/>
-              <a:defRPr sz="1000"/>
-            </a:lvl9pPr>
-          </a:lstStyle>
-          <a:p>
             <a:pPr lvl="0"/>
             <a:r>
               <a:rPr lang="en-US"/>
@@ -2746,13 +2660,7 @@
       </p:sp>
       <p:sp>
         <p:nvSpPr>
-          <p:cNvPr id="5" name="Date Placeholder 4">
-            <a:extLst>
-              <a:ext uri="{FF2B5EF4-FFF2-40B4-BE49-F238E27FC236}">
-                <a16:creationId xmlns:a16="http://schemas.microsoft.com/office/drawing/2014/main" id="{78D3ABCA-BDD2-4217-92F5-4D2D33EF5343}"/>
-              </a:ext>
-            </a:extLst>
-          </p:cNvPr>
+          <p:cNvPr id="5" name="Date Placeholder 4"/>
           <p:cNvSpPr>
             <a:spLocks noGrp="1"/>
           </p:cNvSpPr>
@@ -2767,7 +2675,7 @@
           <a:p>
             <a:fld id="{27B4A0E3-CDE3-4B49-9703-9183D4AA9CA8}" type="datetimeFigureOut">
               <a:rPr lang="en-GB" smtClean="0"/>
-              <a:t>25/03/2025</a:t>
+              <a:t>05/05/2025</a:t>
             </a:fld>
             <a:endParaRPr lang="en-GB"/>
           </a:p>
@@ -2775,13 +2683,7 @@
       </p:sp>
       <p:sp>
         <p:nvSpPr>
-          <p:cNvPr id="6" name="Footer Placeholder 5">
-            <a:extLst>
-              <a:ext uri="{FF2B5EF4-FFF2-40B4-BE49-F238E27FC236}">
-                <a16:creationId xmlns:a16="http://schemas.microsoft.com/office/drawing/2014/main" id="{43A7BF0F-10F4-4DD8-8DDA-1C7795BDE446}"/>
-              </a:ext>
-            </a:extLst>
-          </p:cNvPr>
+          <p:cNvPr id="6" name="Footer Placeholder 5"/>
           <p:cNvSpPr>
             <a:spLocks noGrp="1"/>
           </p:cNvSpPr>
@@ -2800,13 +2702,7 @@
       </p:sp>
       <p:sp>
         <p:nvSpPr>
-          <p:cNvPr id="7" name="Slide Number Placeholder 6">
-            <a:extLst>
-              <a:ext uri="{FF2B5EF4-FFF2-40B4-BE49-F238E27FC236}">
-                <a16:creationId xmlns:a16="http://schemas.microsoft.com/office/drawing/2014/main" id="{3FF12C48-0D80-48D4-9D2C-C3AF22F8FEF6}"/>
-              </a:ext>
-            </a:extLst>
-          </p:cNvPr>
+          <p:cNvPr id="7" name="Slide Number Placeholder 6"/>
           <p:cNvSpPr>
             <a:spLocks noGrp="1"/>
           </p:cNvSpPr>
@@ -2830,7 +2726,7 @@
     </p:spTree>
     <p:extLst>
       <p:ext uri="{BB962C8B-B14F-4D97-AF65-F5344CB8AC3E}">
-        <p14:creationId xmlns:p14="http://schemas.microsoft.com/office/powerpoint/2010/main" val="1321414841"/>
+        <p14:creationId xmlns:p14="http://schemas.microsoft.com/office/powerpoint/2010/main" val="3546026722"/>
       </p:ext>
     </p:extLst>
   </p:cSld>
@@ -2864,13 +2760,7 @@
       </p:grpSpPr>
       <p:sp>
         <p:nvSpPr>
-          <p:cNvPr id="2" name="Title Placeholder 1">
-            <a:extLst>
-              <a:ext uri="{FF2B5EF4-FFF2-40B4-BE49-F238E27FC236}">
-                <a16:creationId xmlns:a16="http://schemas.microsoft.com/office/drawing/2014/main" id="{C9F9E68E-AF4A-4984-B53A-9BD5900A5882}"/>
-              </a:ext>
-            </a:extLst>
-          </p:cNvPr>
+          <p:cNvPr id="2" name="Title Placeholder 1"/>
           <p:cNvSpPr>
             <a:spLocks noGrp="1"/>
           </p:cNvSpPr>
@@ -2880,8 +2770,8 @@
         </p:nvSpPr>
         <p:spPr>
           <a:xfrm>
-            <a:off x="838200" y="365125"/>
-            <a:ext cx="10515600" cy="1325563"/>
+            <a:off x="767259" y="229978"/>
+            <a:ext cx="9625608" cy="834921"/>
           </a:xfrm>
           <a:prstGeom prst="rect">
             <a:avLst/>
@@ -2897,19 +2787,13 @@
               <a:rPr lang="en-US"/>
               <a:t>Click to edit Master title style</a:t>
             </a:r>
-            <a:endParaRPr lang="en-GB"/>
-          </a:p>
-        </p:txBody>
-      </p:sp>
-      <p:sp>
-        <p:nvSpPr>
-          <p:cNvPr id="3" name="Text Placeholder 2">
-            <a:extLst>
-              <a:ext uri="{FF2B5EF4-FFF2-40B4-BE49-F238E27FC236}">
-                <a16:creationId xmlns:a16="http://schemas.microsoft.com/office/drawing/2014/main" id="{6E18593D-AD9F-4696-8AF5-81A5C1F7C0B9}"/>
-              </a:ext>
-            </a:extLst>
-          </p:cNvPr>
+            <a:endParaRPr lang="en-US" dirty="0"/>
+          </a:p>
+        </p:txBody>
+      </p:sp>
+      <p:sp>
+        <p:nvSpPr>
+          <p:cNvPr id="3" name="Text Placeholder 2"/>
           <p:cNvSpPr>
             <a:spLocks noGrp="1"/>
           </p:cNvSpPr>
@@ -2919,8 +2803,8 @@
         </p:nvSpPr>
         <p:spPr>
           <a:xfrm>
-            <a:off x="838200" y="1825625"/>
-            <a:ext cx="10515600" cy="4351338"/>
+            <a:off x="767259" y="1149890"/>
+            <a:ext cx="9625608" cy="2740739"/>
           </a:xfrm>
           <a:prstGeom prst="rect">
             <a:avLst/>
@@ -2965,19 +2849,13 @@
               <a:rPr lang="en-US"/>
               <a:t>Fifth level</a:t>
             </a:r>
-            <a:endParaRPr lang="en-GB"/>
-          </a:p>
-        </p:txBody>
-      </p:sp>
-      <p:sp>
-        <p:nvSpPr>
-          <p:cNvPr id="4" name="Date Placeholder 3">
-            <a:extLst>
-              <a:ext uri="{FF2B5EF4-FFF2-40B4-BE49-F238E27FC236}">
-                <a16:creationId xmlns:a16="http://schemas.microsoft.com/office/drawing/2014/main" id="{89F4FC06-29A7-44A8-BD30-93E9D5BFDE6F}"/>
-              </a:ext>
-            </a:extLst>
-          </p:cNvPr>
+            <a:endParaRPr lang="en-US" dirty="0"/>
+          </a:p>
+        </p:txBody>
+      </p:sp>
+      <p:sp>
+        <p:nvSpPr>
+          <p:cNvPr id="4" name="Date Placeholder 3"/>
           <p:cNvSpPr>
             <a:spLocks noGrp="1"/>
           </p:cNvSpPr>
@@ -2987,8 +2865,8 @@
         </p:nvSpPr>
         <p:spPr>
           <a:xfrm>
-            <a:off x="838200" y="6356350"/>
-            <a:ext cx="2743200" cy="365125"/>
+            <a:off x="767259" y="4003618"/>
+            <a:ext cx="2511028" cy="229978"/>
           </a:xfrm>
           <a:prstGeom prst="rect">
             <a:avLst/>
@@ -2998,7 +2876,7 @@
           <a:bodyPr vert="horz" lIns="91440" tIns="45720" rIns="91440" bIns="45720" rtlCol="0" anchor="ctr"/>
           <a:lstStyle>
             <a:lvl1pPr algn="l">
-              <a:defRPr sz="1200">
+              <a:defRPr sz="756">
                 <a:solidFill>
                   <a:schemeClr val="tx1">
                     <a:tint val="75000"/>
@@ -3010,7 +2888,7 @@
           <a:p>
             <a:fld id="{27B4A0E3-CDE3-4B49-9703-9183D4AA9CA8}" type="datetimeFigureOut">
               <a:rPr lang="en-GB" smtClean="0"/>
-              <a:t>25/03/2025</a:t>
+              <a:t>05/05/2025</a:t>
             </a:fld>
             <a:endParaRPr lang="en-GB"/>
           </a:p>
@@ -3018,13 +2896,7 @@
       </p:sp>
       <p:sp>
         <p:nvSpPr>
-          <p:cNvPr id="5" name="Footer Placeholder 4">
-            <a:extLst>
-              <a:ext uri="{FF2B5EF4-FFF2-40B4-BE49-F238E27FC236}">
-                <a16:creationId xmlns:a16="http://schemas.microsoft.com/office/drawing/2014/main" id="{FEA4DCDC-4AB2-4F04-BC53-1D21FF516650}"/>
-              </a:ext>
-            </a:extLst>
-          </p:cNvPr>
+          <p:cNvPr id="5" name="Footer Placeholder 4"/>
           <p:cNvSpPr>
             <a:spLocks noGrp="1"/>
           </p:cNvSpPr>
@@ -3034,8 +2906,8 @@
         </p:nvSpPr>
         <p:spPr>
           <a:xfrm>
-            <a:off x="4038600" y="6356350"/>
-            <a:ext cx="4114800" cy="365125"/>
+            <a:off x="3696792" y="4003618"/>
+            <a:ext cx="3766542" cy="229978"/>
           </a:xfrm>
           <a:prstGeom prst="rect">
             <a:avLst/>
@@ -3045,7 +2917,7 @@
           <a:bodyPr vert="horz" lIns="91440" tIns="45720" rIns="91440" bIns="45720" rtlCol="0" anchor="ctr"/>
           <a:lstStyle>
             <a:lvl1pPr algn="ctr">
-              <a:defRPr sz="1200">
+              <a:defRPr sz="756">
                 <a:solidFill>
                   <a:schemeClr val="tx1">
                     <a:tint val="75000"/>
@@ -3061,13 +2933,7 @@
       </p:sp>
       <p:sp>
         <p:nvSpPr>
-          <p:cNvPr id="6" name="Slide Number Placeholder 5">
-            <a:extLst>
-              <a:ext uri="{FF2B5EF4-FFF2-40B4-BE49-F238E27FC236}">
-                <a16:creationId xmlns:a16="http://schemas.microsoft.com/office/drawing/2014/main" id="{2F0AEEF7-2269-4941-AE6D-92DAA44B784C}"/>
-              </a:ext>
-            </a:extLst>
-          </p:cNvPr>
+          <p:cNvPr id="6" name="Slide Number Placeholder 5"/>
           <p:cNvSpPr>
             <a:spLocks noGrp="1"/>
           </p:cNvSpPr>
@@ -3077,8 +2943,8 @@
         </p:nvSpPr>
         <p:spPr>
           <a:xfrm>
-            <a:off x="8610600" y="6356350"/>
-            <a:ext cx="2743200" cy="365125"/>
+            <a:off x="7881838" y="4003618"/>
+            <a:ext cx="2511028" cy="229978"/>
           </a:xfrm>
           <a:prstGeom prst="rect">
             <a:avLst/>
@@ -3088,7 +2954,7 @@
           <a:bodyPr vert="horz" lIns="91440" tIns="45720" rIns="91440" bIns="45720" rtlCol="0" anchor="ctr"/>
           <a:lstStyle>
             <a:lvl1pPr algn="r">
-              <a:defRPr sz="1200">
+              <a:defRPr sz="756">
                 <a:solidFill>
                   <a:schemeClr val="tx1">
                     <a:tint val="75000"/>
@@ -3109,27 +2975,27 @@
     </p:spTree>
     <p:extLst>
       <p:ext uri="{BB962C8B-B14F-4D97-AF65-F5344CB8AC3E}">
-        <p14:creationId xmlns:p14="http://schemas.microsoft.com/office/powerpoint/2010/main" val="1559794085"/>
+        <p14:creationId xmlns:p14="http://schemas.microsoft.com/office/powerpoint/2010/main" val="4114288588"/>
       </p:ext>
     </p:extLst>
   </p:cSld>
   <p:clrMap bg1="lt1" tx1="dk1" bg2="lt2" tx2="dk2" accent1="accent1" accent2="accent2" accent3="accent3" accent4="accent4" accent5="accent5" accent6="accent6" hlink="hlink" folHlink="folHlink"/>
   <p:sldLayoutIdLst>
-    <p:sldLayoutId id="2147483649" r:id="rId1"/>
-    <p:sldLayoutId id="2147483650" r:id="rId2"/>
-    <p:sldLayoutId id="2147483651" r:id="rId3"/>
-    <p:sldLayoutId id="2147483652" r:id="rId4"/>
-    <p:sldLayoutId id="2147483653" r:id="rId5"/>
-    <p:sldLayoutId id="2147483654" r:id="rId6"/>
-    <p:sldLayoutId id="2147483655" r:id="rId7"/>
-    <p:sldLayoutId id="2147483656" r:id="rId8"/>
-    <p:sldLayoutId id="2147483657" r:id="rId9"/>
-    <p:sldLayoutId id="2147483658" r:id="rId10"/>
-    <p:sldLayoutId id="2147483659" r:id="rId11"/>
+    <p:sldLayoutId id="2147483685" r:id="rId1"/>
+    <p:sldLayoutId id="2147483686" r:id="rId2"/>
+    <p:sldLayoutId id="2147483687" r:id="rId3"/>
+    <p:sldLayoutId id="2147483688" r:id="rId4"/>
+    <p:sldLayoutId id="2147483689" r:id="rId5"/>
+    <p:sldLayoutId id="2147483690" r:id="rId6"/>
+    <p:sldLayoutId id="2147483691" r:id="rId7"/>
+    <p:sldLayoutId id="2147483692" r:id="rId8"/>
+    <p:sldLayoutId id="2147483693" r:id="rId9"/>
+    <p:sldLayoutId id="2147483694" r:id="rId10"/>
+    <p:sldLayoutId id="2147483695" r:id="rId11"/>
   </p:sldLayoutIdLst>
   <p:txStyles>
     <p:titleStyle>
-      <a:lvl1pPr algn="l" defTabSz="914400" rtl="0" eaLnBrk="1" latinLnBrk="0" hangingPunct="1">
+      <a:lvl1pPr algn="l" defTabSz="575981" rtl="0" eaLnBrk="1" latinLnBrk="0" hangingPunct="1">
         <a:lnSpc>
           <a:spcPct val="90000"/>
         </a:lnSpc>
@@ -3137,7 +3003,7 @@
           <a:spcPct val="0"/>
         </a:spcBef>
         <a:buNone/>
-        <a:defRPr sz="4400" kern="1200">
+        <a:defRPr sz="2772" kern="1200">
           <a:solidFill>
             <a:schemeClr val="tx1"/>
           </a:solidFill>
@@ -3148,16 +3014,16 @@
       </a:lvl1pPr>
     </p:titleStyle>
     <p:bodyStyle>
-      <a:lvl1pPr marL="228600" indent="-228600" algn="l" defTabSz="914400" rtl="0" eaLnBrk="1" latinLnBrk="0" hangingPunct="1">
+      <a:lvl1pPr marL="143995" indent="-143995" algn="l" defTabSz="575981" rtl="0" eaLnBrk="1" latinLnBrk="0" hangingPunct="1">
         <a:lnSpc>
           <a:spcPct val="90000"/>
         </a:lnSpc>
         <a:spcBef>
-          <a:spcPts val="1000"/>
+          <a:spcPts val="630"/>
         </a:spcBef>
         <a:buFont typeface="Arial" panose="020B0604020202020204" pitchFamily="34" charset="0"/>
         <a:buChar char="•"/>
-        <a:defRPr sz="2800" kern="1200">
+        <a:defRPr sz="1764" kern="1200">
           <a:solidFill>
             <a:schemeClr val="tx1"/>
           </a:solidFill>
@@ -3166,16 +3032,16 @@
           <a:cs typeface="+mn-cs"/>
         </a:defRPr>
       </a:lvl1pPr>
-      <a:lvl2pPr marL="685800" indent="-228600" algn="l" defTabSz="914400" rtl="0" eaLnBrk="1" latinLnBrk="0" hangingPunct="1">
+      <a:lvl2pPr marL="431985" indent="-143995" algn="l" defTabSz="575981" rtl="0" eaLnBrk="1" latinLnBrk="0" hangingPunct="1">
         <a:lnSpc>
           <a:spcPct val="90000"/>
         </a:lnSpc>
         <a:spcBef>
-          <a:spcPts val="500"/>
+          <a:spcPts val="315"/>
         </a:spcBef>
         <a:buFont typeface="Arial" panose="020B0604020202020204" pitchFamily="34" charset="0"/>
         <a:buChar char="•"/>
-        <a:defRPr sz="2400" kern="1200">
+        <a:defRPr sz="1512" kern="1200">
           <a:solidFill>
             <a:schemeClr val="tx1"/>
           </a:solidFill>
@@ -3184,16 +3050,16 @@
           <a:cs typeface="+mn-cs"/>
         </a:defRPr>
       </a:lvl2pPr>
-      <a:lvl3pPr marL="1143000" indent="-228600" algn="l" defTabSz="914400" rtl="0" eaLnBrk="1" latinLnBrk="0" hangingPunct="1">
+      <a:lvl3pPr marL="719976" indent="-143995" algn="l" defTabSz="575981" rtl="0" eaLnBrk="1" latinLnBrk="0" hangingPunct="1">
         <a:lnSpc>
           <a:spcPct val="90000"/>
         </a:lnSpc>
         <a:spcBef>
-          <a:spcPts val="500"/>
+          <a:spcPts val="315"/>
         </a:spcBef>
         <a:buFont typeface="Arial" panose="020B0604020202020204" pitchFamily="34" charset="0"/>
         <a:buChar char="•"/>
-        <a:defRPr sz="2000" kern="1200">
+        <a:defRPr sz="1260" kern="1200">
           <a:solidFill>
             <a:schemeClr val="tx1"/>
           </a:solidFill>
@@ -3202,16 +3068,16 @@
           <a:cs typeface="+mn-cs"/>
         </a:defRPr>
       </a:lvl3pPr>
-      <a:lvl4pPr marL="1600200" indent="-228600" algn="l" defTabSz="914400" rtl="0" eaLnBrk="1" latinLnBrk="0" hangingPunct="1">
+      <a:lvl4pPr marL="1007966" indent="-143995" algn="l" defTabSz="575981" rtl="0" eaLnBrk="1" latinLnBrk="0" hangingPunct="1">
         <a:lnSpc>
           <a:spcPct val="90000"/>
         </a:lnSpc>
         <a:spcBef>
-          <a:spcPts val="500"/>
+          <a:spcPts val="315"/>
         </a:spcBef>
         <a:buFont typeface="Arial" panose="020B0604020202020204" pitchFamily="34" charset="0"/>
         <a:buChar char="•"/>
-        <a:defRPr sz="1800" kern="1200">
+        <a:defRPr sz="1134" kern="1200">
           <a:solidFill>
             <a:schemeClr val="tx1"/>
           </a:solidFill>
@@ -3220,16 +3086,16 @@
           <a:cs typeface="+mn-cs"/>
         </a:defRPr>
       </a:lvl4pPr>
-      <a:lvl5pPr marL="2057400" indent="-228600" algn="l" defTabSz="914400" rtl="0" eaLnBrk="1" latinLnBrk="0" hangingPunct="1">
+      <a:lvl5pPr marL="1295956" indent="-143995" algn="l" defTabSz="575981" rtl="0" eaLnBrk="1" latinLnBrk="0" hangingPunct="1">
         <a:lnSpc>
           <a:spcPct val="90000"/>
         </a:lnSpc>
         <a:spcBef>
-          <a:spcPts val="500"/>
+          <a:spcPts val="315"/>
         </a:spcBef>
         <a:buFont typeface="Arial" panose="020B0604020202020204" pitchFamily="34" charset="0"/>
         <a:buChar char="•"/>
-        <a:defRPr sz="1800" kern="1200">
+        <a:defRPr sz="1134" kern="1200">
           <a:solidFill>
             <a:schemeClr val="tx1"/>
           </a:solidFill>
@@ -3238,16 +3104,16 @@
           <a:cs typeface="+mn-cs"/>
         </a:defRPr>
       </a:lvl5pPr>
-      <a:lvl6pPr marL="2514600" indent="-228600" algn="l" defTabSz="914400" rtl="0" eaLnBrk="1" latinLnBrk="0" hangingPunct="1">
+      <a:lvl6pPr marL="1583947" indent="-143995" algn="l" defTabSz="575981" rtl="0" eaLnBrk="1" latinLnBrk="0" hangingPunct="1">
         <a:lnSpc>
           <a:spcPct val="90000"/>
         </a:lnSpc>
         <a:spcBef>
-          <a:spcPts val="500"/>
+          <a:spcPts val="315"/>
         </a:spcBef>
         <a:buFont typeface="Arial" panose="020B0604020202020204" pitchFamily="34" charset="0"/>
         <a:buChar char="•"/>
-        <a:defRPr sz="1800" kern="1200">
+        <a:defRPr sz="1134" kern="1200">
           <a:solidFill>
             <a:schemeClr val="tx1"/>
           </a:solidFill>
@@ -3256,16 +3122,16 @@
           <a:cs typeface="+mn-cs"/>
         </a:defRPr>
       </a:lvl6pPr>
-      <a:lvl7pPr marL="2971800" indent="-228600" algn="l" defTabSz="914400" rtl="0" eaLnBrk="1" latinLnBrk="0" hangingPunct="1">
+      <a:lvl7pPr marL="1871937" indent="-143995" algn="l" defTabSz="575981" rtl="0" eaLnBrk="1" latinLnBrk="0" hangingPunct="1">
         <a:lnSpc>
           <a:spcPct val="90000"/>
         </a:lnSpc>
         <a:spcBef>
-          <a:spcPts val="500"/>
+          <a:spcPts val="315"/>
         </a:spcBef>
         <a:buFont typeface="Arial" panose="020B0604020202020204" pitchFamily="34" charset="0"/>
         <a:buChar char="•"/>
-        <a:defRPr sz="1800" kern="1200">
+        <a:defRPr sz="1134" kern="1200">
           <a:solidFill>
             <a:schemeClr val="tx1"/>
           </a:solidFill>
@@ -3274,16 +3140,16 @@
           <a:cs typeface="+mn-cs"/>
         </a:defRPr>
       </a:lvl7pPr>
-      <a:lvl8pPr marL="3429000" indent="-228600" algn="l" defTabSz="914400" rtl="0" eaLnBrk="1" latinLnBrk="0" hangingPunct="1">
+      <a:lvl8pPr marL="2159927" indent="-143995" algn="l" defTabSz="575981" rtl="0" eaLnBrk="1" latinLnBrk="0" hangingPunct="1">
         <a:lnSpc>
           <a:spcPct val="90000"/>
         </a:lnSpc>
         <a:spcBef>
-          <a:spcPts val="500"/>
+          <a:spcPts val="315"/>
         </a:spcBef>
         <a:buFont typeface="Arial" panose="020B0604020202020204" pitchFamily="34" charset="0"/>
         <a:buChar char="•"/>
-        <a:defRPr sz="1800" kern="1200">
+        <a:defRPr sz="1134" kern="1200">
           <a:solidFill>
             <a:schemeClr val="tx1"/>
           </a:solidFill>
@@ -3292,16 +3158,16 @@
           <a:cs typeface="+mn-cs"/>
         </a:defRPr>
       </a:lvl8pPr>
-      <a:lvl9pPr marL="3886200" indent="-228600" algn="l" defTabSz="914400" rtl="0" eaLnBrk="1" latinLnBrk="0" hangingPunct="1">
+      <a:lvl9pPr marL="2447917" indent="-143995" algn="l" defTabSz="575981" rtl="0" eaLnBrk="1" latinLnBrk="0" hangingPunct="1">
         <a:lnSpc>
           <a:spcPct val="90000"/>
         </a:lnSpc>
         <a:spcBef>
-          <a:spcPts val="500"/>
+          <a:spcPts val="315"/>
         </a:spcBef>
         <a:buFont typeface="Arial" panose="020B0604020202020204" pitchFamily="34" charset="0"/>
         <a:buChar char="•"/>
-        <a:defRPr sz="1800" kern="1200">
+        <a:defRPr sz="1134" kern="1200">
           <a:solidFill>
             <a:schemeClr val="tx1"/>
           </a:solidFill>
@@ -3315,8 +3181,8 @@
       <a:defPPr>
         <a:defRPr lang="en-US"/>
       </a:defPPr>
-      <a:lvl1pPr marL="0" algn="l" defTabSz="914400" rtl="0" eaLnBrk="1" latinLnBrk="0" hangingPunct="1">
-        <a:defRPr sz="1800" kern="1200">
+      <a:lvl1pPr marL="0" algn="l" defTabSz="575981" rtl="0" eaLnBrk="1" latinLnBrk="0" hangingPunct="1">
+        <a:defRPr sz="1134" kern="1200">
           <a:solidFill>
             <a:schemeClr val="tx1"/>
           </a:solidFill>
@@ -3325,8 +3191,8 @@
           <a:cs typeface="+mn-cs"/>
         </a:defRPr>
       </a:lvl1pPr>
-      <a:lvl2pPr marL="457200" algn="l" defTabSz="914400" rtl="0" eaLnBrk="1" latinLnBrk="0" hangingPunct="1">
-        <a:defRPr sz="1800" kern="1200">
+      <a:lvl2pPr marL="287990" algn="l" defTabSz="575981" rtl="0" eaLnBrk="1" latinLnBrk="0" hangingPunct="1">
+        <a:defRPr sz="1134" kern="1200">
           <a:solidFill>
             <a:schemeClr val="tx1"/>
           </a:solidFill>
@@ -3335,8 +3201,8 @@
           <a:cs typeface="+mn-cs"/>
         </a:defRPr>
       </a:lvl2pPr>
-      <a:lvl3pPr marL="914400" algn="l" defTabSz="914400" rtl="0" eaLnBrk="1" latinLnBrk="0" hangingPunct="1">
-        <a:defRPr sz="1800" kern="1200">
+      <a:lvl3pPr marL="575981" algn="l" defTabSz="575981" rtl="0" eaLnBrk="1" latinLnBrk="0" hangingPunct="1">
+        <a:defRPr sz="1134" kern="1200">
           <a:solidFill>
             <a:schemeClr val="tx1"/>
           </a:solidFill>
@@ -3345,8 +3211,8 @@
           <a:cs typeface="+mn-cs"/>
         </a:defRPr>
       </a:lvl3pPr>
-      <a:lvl4pPr marL="1371600" algn="l" defTabSz="914400" rtl="0" eaLnBrk="1" latinLnBrk="0" hangingPunct="1">
-        <a:defRPr sz="1800" kern="1200">
+      <a:lvl4pPr marL="863971" algn="l" defTabSz="575981" rtl="0" eaLnBrk="1" latinLnBrk="0" hangingPunct="1">
+        <a:defRPr sz="1134" kern="1200">
           <a:solidFill>
             <a:schemeClr val="tx1"/>
           </a:solidFill>
@@ -3355,8 +3221,8 @@
           <a:cs typeface="+mn-cs"/>
         </a:defRPr>
       </a:lvl4pPr>
-      <a:lvl5pPr marL="1828800" algn="l" defTabSz="914400" rtl="0" eaLnBrk="1" latinLnBrk="0" hangingPunct="1">
-        <a:defRPr sz="1800" kern="1200">
+      <a:lvl5pPr marL="1151961" algn="l" defTabSz="575981" rtl="0" eaLnBrk="1" latinLnBrk="0" hangingPunct="1">
+        <a:defRPr sz="1134" kern="1200">
           <a:solidFill>
             <a:schemeClr val="tx1"/>
           </a:solidFill>
@@ -3365,8 +3231,8 @@
           <a:cs typeface="+mn-cs"/>
         </a:defRPr>
       </a:lvl5pPr>
-      <a:lvl6pPr marL="2286000" algn="l" defTabSz="914400" rtl="0" eaLnBrk="1" latinLnBrk="0" hangingPunct="1">
-        <a:defRPr sz="1800" kern="1200">
+      <a:lvl6pPr marL="1439951" algn="l" defTabSz="575981" rtl="0" eaLnBrk="1" latinLnBrk="0" hangingPunct="1">
+        <a:defRPr sz="1134" kern="1200">
           <a:solidFill>
             <a:schemeClr val="tx1"/>
           </a:solidFill>
@@ -3375,8 +3241,8 @@
           <a:cs typeface="+mn-cs"/>
         </a:defRPr>
       </a:lvl6pPr>
-      <a:lvl7pPr marL="2743200" algn="l" defTabSz="914400" rtl="0" eaLnBrk="1" latinLnBrk="0" hangingPunct="1">
-        <a:defRPr sz="1800" kern="1200">
+      <a:lvl7pPr marL="1727942" algn="l" defTabSz="575981" rtl="0" eaLnBrk="1" latinLnBrk="0" hangingPunct="1">
+        <a:defRPr sz="1134" kern="1200">
           <a:solidFill>
             <a:schemeClr val="tx1"/>
           </a:solidFill>
@@ -3385,8 +3251,8 @@
           <a:cs typeface="+mn-cs"/>
         </a:defRPr>
       </a:lvl7pPr>
-      <a:lvl8pPr marL="3200400" algn="l" defTabSz="914400" rtl="0" eaLnBrk="1" latinLnBrk="0" hangingPunct="1">
-        <a:defRPr sz="1800" kern="1200">
+      <a:lvl8pPr marL="2015932" algn="l" defTabSz="575981" rtl="0" eaLnBrk="1" latinLnBrk="0" hangingPunct="1">
+        <a:defRPr sz="1134" kern="1200">
           <a:solidFill>
             <a:schemeClr val="tx1"/>
           </a:solidFill>
@@ -3395,8 +3261,8 @@
           <a:cs typeface="+mn-cs"/>
         </a:defRPr>
       </a:lvl8pPr>
-      <a:lvl9pPr marL="3657600" algn="l" defTabSz="914400" rtl="0" eaLnBrk="1" latinLnBrk="0" hangingPunct="1">
-        <a:defRPr sz="1800" kern="1200">
+      <a:lvl9pPr marL="2303922" algn="l" defTabSz="575981" rtl="0" eaLnBrk="1" latinLnBrk="0" hangingPunct="1">
+        <a:defRPr sz="1134" kern="1200">
           <a:solidFill>
             <a:schemeClr val="tx1"/>
           </a:solidFill>
@@ -3441,7 +3307,7 @@
         </p:nvGrpSpPr>
         <p:grpSpPr>
           <a:xfrm>
-            <a:off x="4561245" y="1699708"/>
+            <a:off x="4325527" y="541115"/>
             <a:ext cx="1151068" cy="1151068"/>
             <a:chOff x="3356386" y="1699708"/>
             <a:chExt cx="1151068" cy="1151068"/>
@@ -3530,20 +3396,17 @@
               <a:pPr algn="ctr"/>
               <a:r>
                 <a:rPr lang="en-US" sz="3000" i="1" dirty="0">
-                  <a:latin typeface="Arial" panose="020B0604020202020204" pitchFamily="34" charset="0"/>
                   <a:cs typeface="Arial" panose="020B0604020202020204" pitchFamily="34" charset="0"/>
                 </a:rPr>
                 <a:t>l</a:t>
               </a:r>
               <a:r>
                 <a:rPr lang="en-US" sz="3000" i="1" baseline="-25000" dirty="0">
-                  <a:latin typeface="Arial" panose="020B0604020202020204" pitchFamily="34" charset="0"/>
                   <a:cs typeface="Arial" panose="020B0604020202020204" pitchFamily="34" charset="0"/>
                 </a:rPr>
                 <a:t>t-1</a:t>
               </a:r>
               <a:endParaRPr lang="en-GB" sz="3000" i="1" dirty="0">
-                <a:latin typeface="Arial" panose="020B0604020202020204" pitchFamily="34" charset="0"/>
                 <a:cs typeface="Arial" panose="020B0604020202020204" pitchFamily="34" charset="0"/>
               </a:endParaRPr>
             </a:p>
@@ -3564,7 +3427,7 @@
         </p:nvGrpSpPr>
         <p:grpSpPr>
           <a:xfrm>
-            <a:off x="6725325" y="1699708"/>
+            <a:off x="6489607" y="541115"/>
             <a:ext cx="1151068" cy="1151068"/>
             <a:chOff x="3356386" y="1699708"/>
             <a:chExt cx="1151068" cy="1151068"/>
@@ -3653,20 +3516,17 @@
               <a:pPr algn="ctr"/>
               <a:r>
                 <a:rPr lang="en-US" sz="3000" i="1" dirty="0" err="1">
-                  <a:latin typeface="Arial" panose="020B0604020202020204" pitchFamily="34" charset="0"/>
                   <a:cs typeface="Arial" panose="020B0604020202020204" pitchFamily="34" charset="0"/>
                 </a:rPr>
                 <a:t>l</a:t>
               </a:r>
               <a:r>
                 <a:rPr lang="en-US" sz="3000" i="1" baseline="-25000" dirty="0" err="1">
-                  <a:latin typeface="Arial" panose="020B0604020202020204" pitchFamily="34" charset="0"/>
                   <a:cs typeface="Arial" panose="020B0604020202020204" pitchFamily="34" charset="0"/>
                 </a:rPr>
                 <a:t>t</a:t>
               </a:r>
               <a:endParaRPr lang="en-GB" sz="3000" i="1" dirty="0">
-                <a:latin typeface="Arial" panose="020B0604020202020204" pitchFamily="34" charset="0"/>
                 <a:cs typeface="Arial" panose="020B0604020202020204" pitchFamily="34" charset="0"/>
               </a:endParaRPr>
             </a:p>
@@ -3687,7 +3547,7 @@
         </p:nvGrpSpPr>
         <p:grpSpPr>
           <a:xfrm>
-            <a:off x="8889405" y="1699708"/>
+            <a:off x="8653687" y="541115"/>
             <a:ext cx="1151068" cy="1151068"/>
             <a:chOff x="3356386" y="1699708"/>
             <a:chExt cx="1151068" cy="1151068"/>
@@ -3776,20 +3636,17 @@
               <a:pPr algn="ctr"/>
               <a:r>
                 <a:rPr lang="en-US" sz="3000" i="1" dirty="0">
-                  <a:latin typeface="Arial" panose="020B0604020202020204" pitchFamily="34" charset="0"/>
                   <a:cs typeface="Arial" panose="020B0604020202020204" pitchFamily="34" charset="0"/>
                 </a:rPr>
                 <a:t>l</a:t>
               </a:r>
               <a:r>
                 <a:rPr lang="en-US" sz="3000" i="1" baseline="-25000" dirty="0">
-                  <a:latin typeface="Arial" panose="020B0604020202020204" pitchFamily="34" charset="0"/>
                   <a:cs typeface="Arial" panose="020B0604020202020204" pitchFamily="34" charset="0"/>
                 </a:rPr>
                 <a:t>t+1</a:t>
               </a:r>
               <a:endParaRPr lang="en-GB" sz="3000" i="1" dirty="0">
-                <a:latin typeface="Arial" panose="020B0604020202020204" pitchFamily="34" charset="0"/>
                 <a:cs typeface="Arial" panose="020B0604020202020204" pitchFamily="34" charset="0"/>
               </a:endParaRPr>
             </a:p>
@@ -3810,7 +3667,7 @@
         </p:nvGrpSpPr>
         <p:grpSpPr>
           <a:xfrm>
-            <a:off x="4561245" y="3627120"/>
+            <a:off x="4325527" y="2468527"/>
             <a:ext cx="1151068" cy="1151068"/>
             <a:chOff x="3356386" y="1699708"/>
             <a:chExt cx="1151068" cy="1151068"/>
@@ -3899,20 +3756,17 @@
               <a:pPr algn="ctr"/>
               <a:r>
                 <a:rPr lang="en-US" sz="3000" i="1" dirty="0">
-                  <a:latin typeface="Arial" panose="020B0604020202020204" pitchFamily="34" charset="0"/>
                   <a:cs typeface="Arial" panose="020B0604020202020204" pitchFamily="34" charset="0"/>
                 </a:rPr>
                 <a:t>S</a:t>
               </a:r>
               <a:r>
                 <a:rPr lang="en-US" sz="3000" i="1" baseline="-25000" dirty="0">
-                  <a:latin typeface="Arial" panose="020B0604020202020204" pitchFamily="34" charset="0"/>
                   <a:cs typeface="Arial" panose="020B0604020202020204" pitchFamily="34" charset="0"/>
                 </a:rPr>
                 <a:t>t-1</a:t>
               </a:r>
               <a:endParaRPr lang="en-GB" sz="3000" i="1" dirty="0">
-                <a:latin typeface="Arial" panose="020B0604020202020204" pitchFamily="34" charset="0"/>
                 <a:cs typeface="Arial" panose="020B0604020202020204" pitchFamily="34" charset="0"/>
               </a:endParaRPr>
             </a:p>
@@ -3933,7 +3787,7 @@
         </p:nvGrpSpPr>
         <p:grpSpPr>
           <a:xfrm>
-            <a:off x="6725325" y="3627120"/>
+            <a:off x="6489607" y="2468527"/>
             <a:ext cx="1151068" cy="1151068"/>
             <a:chOff x="3356386" y="1699708"/>
             <a:chExt cx="1151068" cy="1151068"/>
@@ -4022,20 +3876,17 @@
               <a:pPr algn="ctr"/>
               <a:r>
                 <a:rPr lang="en-US" sz="3000" i="1" dirty="0">
-                  <a:latin typeface="Arial" panose="020B0604020202020204" pitchFamily="34" charset="0"/>
                   <a:cs typeface="Arial" panose="020B0604020202020204" pitchFamily="34" charset="0"/>
                 </a:rPr>
                 <a:t>S</a:t>
               </a:r>
               <a:r>
                 <a:rPr lang="en-US" sz="3000" i="1" baseline="-25000" dirty="0">
-                  <a:latin typeface="Arial" panose="020B0604020202020204" pitchFamily="34" charset="0"/>
                   <a:cs typeface="Arial" panose="020B0604020202020204" pitchFamily="34" charset="0"/>
                 </a:rPr>
                 <a:t>t</a:t>
               </a:r>
               <a:endParaRPr lang="en-GB" sz="3000" i="1" dirty="0">
-                <a:latin typeface="Arial" panose="020B0604020202020204" pitchFamily="34" charset="0"/>
                 <a:cs typeface="Arial" panose="020B0604020202020204" pitchFamily="34" charset="0"/>
               </a:endParaRPr>
             </a:p>
@@ -4056,7 +3907,7 @@
         </p:nvGrpSpPr>
         <p:grpSpPr>
           <a:xfrm>
-            <a:off x="8889405" y="3627120"/>
+            <a:off x="8653687" y="2468527"/>
             <a:ext cx="1151068" cy="1151068"/>
             <a:chOff x="3356386" y="1699708"/>
             <a:chExt cx="1151068" cy="1151068"/>
@@ -4145,20 +3996,17 @@
               <a:pPr algn="ctr"/>
               <a:r>
                 <a:rPr lang="en-US" sz="3000" i="1" dirty="0">
-                  <a:latin typeface="Arial" panose="020B0604020202020204" pitchFamily="34" charset="0"/>
                   <a:cs typeface="Arial" panose="020B0604020202020204" pitchFamily="34" charset="0"/>
                 </a:rPr>
                 <a:t>S</a:t>
               </a:r>
               <a:r>
                 <a:rPr lang="en-US" sz="3000" i="1" baseline="-25000" dirty="0">
-                  <a:latin typeface="Arial" panose="020B0604020202020204" pitchFamily="34" charset="0"/>
                   <a:cs typeface="Arial" panose="020B0604020202020204" pitchFamily="34" charset="0"/>
                 </a:rPr>
                 <a:t>t+1</a:t>
               </a:r>
               <a:endParaRPr lang="en-GB" sz="3000" i="1" dirty="0">
-                <a:latin typeface="Arial" panose="020B0604020202020204" pitchFamily="34" charset="0"/>
                 <a:cs typeface="Arial" panose="020B0604020202020204" pitchFamily="34" charset="0"/>
               </a:endParaRPr>
             </a:p>
@@ -4183,7 +4031,7 @@
         </p:nvCxnSpPr>
         <p:spPr>
           <a:xfrm flipV="1">
-            <a:off x="5136779" y="2850776"/>
+            <a:off x="4901061" y="1692183"/>
             <a:ext cx="0" cy="776344"/>
           </a:xfrm>
           <a:prstGeom prst="straightConnector1">
@@ -4229,7 +4077,7 @@
         </p:nvCxnSpPr>
         <p:spPr>
           <a:xfrm flipV="1">
-            <a:off x="7300859" y="2850776"/>
+            <a:off x="7065141" y="1692183"/>
             <a:ext cx="0" cy="776344"/>
           </a:xfrm>
           <a:prstGeom prst="straightConnector1">
@@ -4275,7 +4123,7 @@
         </p:nvCxnSpPr>
         <p:spPr>
           <a:xfrm flipV="1">
-            <a:off x="9464939" y="2850776"/>
+            <a:off x="9229221" y="1692183"/>
             <a:ext cx="0" cy="776344"/>
           </a:xfrm>
           <a:prstGeom prst="straightConnector1">
@@ -4321,7 +4169,7 @@
         </p:nvCxnSpPr>
         <p:spPr>
           <a:xfrm>
-            <a:off x="5712313" y="4202654"/>
+            <a:off x="5476595" y="3044061"/>
             <a:ext cx="1013012" cy="0"/>
           </a:xfrm>
           <a:prstGeom prst="straightConnector1">
@@ -4367,7 +4215,7 @@
         </p:nvCxnSpPr>
         <p:spPr>
           <a:xfrm>
-            <a:off x="7876393" y="4202654"/>
+            <a:off x="7640675" y="3044061"/>
             <a:ext cx="1013012" cy="0"/>
           </a:xfrm>
           <a:prstGeom prst="straightConnector1">
@@ -4411,7 +4259,7 @@
         </p:nvCxnSpPr>
         <p:spPr>
           <a:xfrm>
-            <a:off x="10040473" y="4202654"/>
+            <a:off x="9804755" y="3044061"/>
             <a:ext cx="1013012" cy="0"/>
           </a:xfrm>
           <a:prstGeom prst="straightConnector1">
@@ -4458,7 +4306,7 @@
         </p:nvCxnSpPr>
         <p:spPr>
           <a:xfrm>
-            <a:off x="3548234" y="4202654"/>
+            <a:off x="3312519" y="3044061"/>
             <a:ext cx="1013011" cy="0"/>
           </a:xfrm>
           <a:prstGeom prst="straightConnector1">
@@ -4501,7 +4349,7 @@
         </p:nvSpPr>
         <p:spPr>
           <a:xfrm>
-            <a:off x="2397166" y="3627120"/>
+            <a:off x="2161448" y="2468527"/>
             <a:ext cx="1151068" cy="1151068"/>
           </a:xfrm>
           <a:prstGeom prst="ellipse">
@@ -4551,7 +4399,7 @@
         </p:nvSpPr>
         <p:spPr>
           <a:xfrm>
-            <a:off x="387276" y="1998243"/>
+            <a:off x="151560" y="839650"/>
             <a:ext cx="2850775" cy="553998"/>
           </a:xfrm>
           <a:prstGeom prst="rect">
@@ -4568,13 +4416,11 @@
             <a:pPr algn="ctr"/>
             <a:r>
               <a:rPr lang="en-US" sz="3000" b="1" dirty="0">
-                <a:latin typeface="Arial" panose="020B0604020202020204" pitchFamily="34" charset="0"/>
                 <a:cs typeface="Arial" panose="020B0604020202020204" pitchFamily="34" charset="0"/>
               </a:rPr>
               <a:t>observations</a:t>
             </a:r>
             <a:endParaRPr lang="en-GB" sz="3000" b="1" dirty="0">
-              <a:latin typeface="Arial" panose="020B0604020202020204" pitchFamily="34" charset="0"/>
               <a:cs typeface="Arial" panose="020B0604020202020204" pitchFamily="34" charset="0"/>
             </a:endParaRPr>
           </a:p>
@@ -4594,7 +4440,7 @@
         </p:nvSpPr>
         <p:spPr>
           <a:xfrm>
-            <a:off x="387276" y="3925655"/>
+            <a:off x="151558" y="2767062"/>
             <a:ext cx="2859744" cy="553998"/>
           </a:xfrm>
           <a:prstGeom prst="rect">
@@ -4611,13 +4457,11 @@
             <a:pPr algn="ctr"/>
             <a:r>
               <a:rPr lang="en-US" sz="3000" b="1" dirty="0">
-                <a:latin typeface="Arial" panose="020B0604020202020204" pitchFamily="34" charset="0"/>
                 <a:cs typeface="Arial" panose="020B0604020202020204" pitchFamily="34" charset="0"/>
               </a:rPr>
               <a:t>hidden states</a:t>
             </a:r>
             <a:endParaRPr lang="en-GB" sz="3000" b="1" dirty="0">
-              <a:latin typeface="Arial" panose="020B0604020202020204" pitchFamily="34" charset="0"/>
               <a:cs typeface="Arial" panose="020B0604020202020204" pitchFamily="34" charset="0"/>
             </a:endParaRPr>
           </a:p>
@@ -4639,7 +4483,7 @@
 <file path=ppt/theme/theme1.xml><?xml version="1.0" encoding="utf-8"?>
 <a:theme xmlns:a="http://schemas.openxmlformats.org/drawingml/2006/main" name="Office Theme">
   <a:themeElements>
-    <a:clrScheme name="Office">
+    <a:clrScheme name="Office Theme">
       <a:dk1>
         <a:sysClr val="windowText" lastClr="000000"/>
       </a:dk1>
@@ -4677,7 +4521,7 @@
         <a:srgbClr val="954F72"/>
       </a:folHlink>
     </a:clrScheme>
-    <a:fontScheme name="Office">
+    <a:fontScheme name="Office Theme">
       <a:majorFont>
         <a:latin typeface="Calibri Light" panose="020F0302020204030204"/>
         <a:ea typeface=""/>
@@ -4712,23 +4556,6 @@
         <a:font script="Viet" typeface="Times New Roman"/>
         <a:font script="Uigh" typeface="Microsoft Uighur"/>
         <a:font script="Geor" typeface="Sylfaen"/>
-        <a:font script="Armn" typeface="Arial"/>
-        <a:font script="Bugi" typeface="Leelawadee UI"/>
-        <a:font script="Bopo" typeface="Microsoft JhengHei"/>
-        <a:font script="Java" typeface="Javanese Text"/>
-        <a:font script="Lisu" typeface="Segoe UI"/>
-        <a:font script="Mymr" typeface="Myanmar Text"/>
-        <a:font script="Nkoo" typeface="Ebrima"/>
-        <a:font script="Olck" typeface="Nirmala UI"/>
-        <a:font script="Osma" typeface="Ebrima"/>
-        <a:font script="Phag" typeface="Phagspa"/>
-        <a:font script="Syrn" typeface="Estrangelo Edessa"/>
-        <a:font script="Syrj" typeface="Estrangelo Edessa"/>
-        <a:font script="Syre" typeface="Estrangelo Edessa"/>
-        <a:font script="Sora" typeface="Nirmala UI"/>
-        <a:font script="Tale" typeface="Microsoft Tai Le"/>
-        <a:font script="Talu" typeface="Microsoft New Tai Lue"/>
-        <a:font script="Tfng" typeface="Ebrima"/>
       </a:majorFont>
       <a:minorFont>
         <a:latin typeface="Calibri" panose="020F0502020204030204"/>
@@ -4764,26 +4591,9 @@
         <a:font script="Viet" typeface="Arial"/>
         <a:font script="Uigh" typeface="Microsoft Uighur"/>
         <a:font script="Geor" typeface="Sylfaen"/>
-        <a:font script="Armn" typeface="Arial"/>
-        <a:font script="Bugi" typeface="Leelawadee UI"/>
-        <a:font script="Bopo" typeface="Microsoft JhengHei"/>
-        <a:font script="Java" typeface="Javanese Text"/>
-        <a:font script="Lisu" typeface="Segoe UI"/>
-        <a:font script="Mymr" typeface="Myanmar Text"/>
-        <a:font script="Nkoo" typeface="Ebrima"/>
-        <a:font script="Olck" typeface="Nirmala UI"/>
-        <a:font script="Osma" typeface="Ebrima"/>
-        <a:font script="Phag" typeface="Phagspa"/>
-        <a:font script="Syrn" typeface="Estrangelo Edessa"/>
-        <a:font script="Syrj" typeface="Estrangelo Edessa"/>
-        <a:font script="Syre" typeface="Estrangelo Edessa"/>
-        <a:font script="Sora" typeface="Nirmala UI"/>
-        <a:font script="Tale" typeface="Microsoft Tai Le"/>
-        <a:font script="Talu" typeface="Microsoft New Tai Lue"/>
-        <a:font script="Tfng" typeface="Ebrima"/>
       </a:minorFont>
     </a:fontScheme>
-    <a:fmtScheme name="Office">
+    <a:fmtScheme name="Office Theme">
       <a:fillStyleLst>
         <a:solidFill>
           <a:schemeClr val="phClr"/>
@@ -4932,23 +4742,6 @@
 </file>
 
 <file path=customXml/item1.xml><?xml version="1.0" encoding="utf-8"?>
-<p:properties xmlns:p="http://schemas.microsoft.com/office/2006/metadata/properties" xmlns:xsi="http://www.w3.org/2001/XMLSchema-instance" xmlns:pc="http://schemas.microsoft.com/office/infopath/2007/PartnerControls">
-  <documentManagement>
-    <_activity xmlns="cac1e38d-e8c1-4548-bda7-a912a888af67" xsi:nil="true"/>
-  </documentManagement>
-</p:properties>
-</file>
-
-<file path=customXml/item2.xml><?xml version="1.0" encoding="utf-8"?>
-<?mso-contentType ?>
-<FormTemplates xmlns="http://schemas.microsoft.com/sharepoint/v3/contenttype/forms">
-  <Display>DocumentLibraryForm</Display>
-  <Edit>DocumentLibraryForm</Edit>
-  <New>DocumentLibraryForm</New>
-</FormTemplates>
-</file>
-
-<file path=customXml/item3.xml><?xml version="1.0" encoding="utf-8"?>
 <ct:contentTypeSchema xmlns:ct="http://schemas.microsoft.com/office/2006/metadata/contentType" xmlns:ma="http://schemas.microsoft.com/office/2006/metadata/properties/metaAttributes" ct:_="" ma:_="" ma:contentTypeName="Document" ma:contentTypeID="0x01010041744D9A9E29D54CA5A28E039B7C1615" ma:contentTypeVersion="18" ma:contentTypeDescription="Een nieuw document maken." ma:contentTypeScope="" ma:versionID="b94f997d0dc287e7051c0416d60e8c39">
   <xsd:schema xmlns:xsd="http://www.w3.org/2001/XMLSchema" xmlns:xs="http://www.w3.org/2001/XMLSchema" xmlns:p="http://schemas.microsoft.com/office/2006/metadata/properties" xmlns:ns3="cac1e38d-e8c1-4548-bda7-a912a888af67" xmlns:ns4="d68a254f-a789-4585-a0bc-f8e53ec1d82e" targetNamespace="http://schemas.microsoft.com/office/2006/metadata/properties" ma:root="true" ma:fieldsID="974d45a9bac523a07bcdf1c83f585aea" ns3:_="" ns4:_="">
     <xsd:import namespace="cac1e38d-e8c1-4548-bda7-a912a888af67"/>
@@ -5201,32 +4994,24 @@
 </ct:contentTypeSchema>
 </file>
 
-<file path=customXml/itemProps1.xml><?xml version="1.0" encoding="utf-8"?>
-<ds:datastoreItem xmlns:ds="http://schemas.openxmlformats.org/officeDocument/2006/customXml" ds:itemID="{BE3D9AB6-8CC7-4DE1-9171-B39256CC2B2F}">
-  <ds:schemaRefs>
-    <ds:schemaRef ds:uri="http://purl.org/dc/terms/"/>
-    <ds:schemaRef ds:uri="http://purl.org/dc/dcmitype/"/>
-    <ds:schemaRef ds:uri="d68a254f-a789-4585-a0bc-f8e53ec1d82e"/>
-    <ds:schemaRef ds:uri="http://schemas.microsoft.com/office/2006/metadata/properties"/>
-    <ds:schemaRef ds:uri="http://schemas.openxmlformats.org/package/2006/metadata/core-properties"/>
-    <ds:schemaRef ds:uri="http://schemas.microsoft.com/office/2006/documentManagement/types"/>
-    <ds:schemaRef ds:uri="cac1e38d-e8c1-4548-bda7-a912a888af67"/>
-    <ds:schemaRef ds:uri="http://schemas.microsoft.com/office/infopath/2007/PartnerControls"/>
-    <ds:schemaRef ds:uri="http://www.w3.org/XML/1998/namespace"/>
-    <ds:schemaRef ds:uri="http://purl.org/dc/elements/1.1/"/>
-  </ds:schemaRefs>
-</ds:datastoreItem>
+<file path=customXml/item2.xml><?xml version="1.0" encoding="utf-8"?>
+<?mso-contentType ?>
+<FormTemplates xmlns="http://schemas.microsoft.com/sharepoint/v3/contenttype/forms">
+  <Display>DocumentLibraryForm</Display>
+  <Edit>DocumentLibraryForm</Edit>
+  <New>DocumentLibraryForm</New>
+</FormTemplates>
 </file>
 
-<file path=customXml/itemProps2.xml><?xml version="1.0" encoding="utf-8"?>
-<ds:datastoreItem xmlns:ds="http://schemas.openxmlformats.org/officeDocument/2006/customXml" ds:itemID="{D8ECC083-4043-4293-83E1-C7B5D6F17B58}">
-  <ds:schemaRefs>
-    <ds:schemaRef ds:uri="http://schemas.microsoft.com/sharepoint/v3/contenttype/forms"/>
-  </ds:schemaRefs>
-</ds:datastoreItem>
+<file path=customXml/item3.xml><?xml version="1.0" encoding="utf-8"?>
+<p:properties xmlns:p="http://schemas.microsoft.com/office/2006/metadata/properties" xmlns:xsi="http://www.w3.org/2001/XMLSchema-instance" xmlns:pc="http://schemas.microsoft.com/office/infopath/2007/PartnerControls">
+  <documentManagement>
+    <_activity xmlns="cac1e38d-e8c1-4548-bda7-a912a888af67" xsi:nil="true"/>
+  </documentManagement>
+</p:properties>
 </file>
 
-<file path=customXml/itemProps3.xml><?xml version="1.0" encoding="utf-8"?>
+<file path=customXml/itemProps1.xml><?xml version="1.0" encoding="utf-8"?>
 <ds:datastoreItem xmlns:ds="http://schemas.openxmlformats.org/officeDocument/2006/customXml" ds:itemID="{2F0BEFAC-BAA9-4D12-B137-C074B979B0C7}">
   <ds:schemaRefs>
     <ds:schemaRef ds:uri="http://schemas.microsoft.com/office/2006/metadata/contentType"/>
@@ -5243,4 +5028,29 @@
     <ds:schemaRef ds:uri="http://schemas.microsoft.com/internal/obd"/>
   </ds:schemaRefs>
 </ds:datastoreItem>
+</file>
+
+<file path=customXml/itemProps2.xml><?xml version="1.0" encoding="utf-8"?>
+<ds:datastoreItem xmlns:ds="http://schemas.openxmlformats.org/officeDocument/2006/customXml" ds:itemID="{D8ECC083-4043-4293-83E1-C7B5D6F17B58}">
+  <ds:schemaRefs>
+    <ds:schemaRef ds:uri="http://schemas.microsoft.com/sharepoint/v3/contenttype/forms"/>
+  </ds:schemaRefs>
+</ds:datastoreItem>
+</file>
+
+<file path=customXml/itemProps3.xml><?xml version="1.0" encoding="utf-8"?>
+<ds:datastoreItem xmlns:ds="http://schemas.openxmlformats.org/officeDocument/2006/customXml" ds:itemID="{BE3D9AB6-8CC7-4DE1-9171-B39256CC2B2F}">
+  <ds:schemaRefs>
+    <ds:schemaRef ds:uri="http://purl.org/dc/terms/"/>
+    <ds:schemaRef ds:uri="d68a254f-a789-4585-a0bc-f8e53ec1d82e"/>
+    <ds:schemaRef ds:uri="http://schemas.openxmlformats.org/package/2006/metadata/core-properties"/>
+    <ds:schemaRef ds:uri="http://schemas.microsoft.com/office/2006/documentManagement/types"/>
+    <ds:schemaRef ds:uri="http://schemas.microsoft.com/office/2006/metadata/properties"/>
+    <ds:schemaRef ds:uri="http://www.w3.org/XML/1998/namespace"/>
+    <ds:schemaRef ds:uri="http://purl.org/dc/elements/1.1/"/>
+    <ds:schemaRef ds:uri="http://schemas.microsoft.com/office/infopath/2007/PartnerControls"/>
+    <ds:schemaRef ds:uri="cac1e38d-e8c1-4548-bda7-a912a888af67"/>
+    <ds:schemaRef ds:uri="http://purl.org/dc/dcmitype/"/>
+  </ds:schemaRefs>
+</ds:datastoreItem>
 </file>